--- a/assets/figures-editable/c1-c2/c1-e22.pptx
+++ b/assets/figures-editable/c1-c2/c1-e22.pptx
@@ -7,7 +7,7 @@
   <p:sldIdLst>
     <p:sldId id="256" r:id="rId7"/>
   </p:sldIdLst>
-  <p:sldSz cx="11948160" cy="7924799" type="screen4x3"/>
+  <p:sldSz cx="12191695" cy="6858000" type="screen4x3"/>
   <p:notesSz cx="6858000" cy="9144000"/>
   <p:defaultTextStyle>
     <a:defPPr>
@@ -3098,14 +3098,14 @@
       <p:grpSpPr/>
       <p:sp>
         <p:nvSpPr>
-          <p:cNvPr id="2" name="text1" descr="sci-ppt:C1-E22-001"/>
+          <p:cNvPr id="2" name="C1-E22 text 0" descr="sci-ppt:o000"/>
           <p:cNvSpPr txBox="1"/>
           <p:nvPr/>
         </p:nvSpPr>
         <p:spPr>
           <a:xfrm>
-            <a:off x="316992" y="268224"/>
-            <a:ext cx="11277600" cy="359054"/>
+            <a:off x="274320" y="118872"/>
+            <a:ext cx="11612880" cy="340105"/>
           </a:xfrm>
           <a:prstGeom prst="rect">
             <a:avLst/>
@@ -3114,7 +3114,7 @@
           <a:effectLst/>
         </p:spPr>
         <p:txBody>
-          <a:bodyPr wrap="none" lIns="27432" rIns="27432" tIns="18288" bIns="18288" anchor="ctr">
+          <a:bodyPr wrap="none" lIns="18288" rIns="18288" tIns="18288" bIns="18288" anchor="t">
             <a:spAutoFit/>
           </a:bodyPr>
           <a:lstStyle/>
@@ -3125,37 +3125,907 @@
               </a:spcAft>
             </a:pPr>
             <a:r>
-              <a:rPr sz="1823" b="0" i="0">
+              <a:rPr sz="1900" b="1" i="0">
                 <a:solidFill>
                   <a:srgbClr val="8EDBD4"/>
                 </a:solidFill>
                 <a:latin typeface="Arial"/>
               </a:rPr>
-              <a:t>C1-E22 | Physical-variable diagram</a:t>
-            </a:r>
-          </a:p>
-        </p:txBody>
-      </p:sp>
-      <p:sp>
-        <p:nvSpPr>
-          <p:cNvPr id="3" name="rect2" descr="sci-ppt:C1-E22-002"/>
+              <a:t>C1-E22 · Exact fixed-position integrated incompressible momentum</a:t>
+            </a:r>
+          </a:p>
+        </p:txBody>
+      </p:sp>
+      <p:sp>
+        <p:nvSpPr>
+          <p:cNvPr id="3" name="C1-E22 text 1" descr="sci-ppt:o001"/>
+          <p:cNvSpPr txBox="1"/>
+          <p:nvPr/>
+        </p:nvSpPr>
+        <p:spPr>
+          <a:xfrm>
+            <a:off x="457200" y="914400"/>
+            <a:ext cx="7132320" cy="262636"/>
+          </a:xfrm>
+          <a:prstGeom prst="rect">
+            <a:avLst/>
+          </a:prstGeom>
+          <a:noFill/>
+          <a:effectLst/>
+        </p:spPr>
+        <p:txBody>
+          <a:bodyPr wrap="none" lIns="18288" rIns="18288" tIns="18288" bIns="18288" anchor="t">
+            <a:spAutoFit/>
+          </a:bodyPr>
+          <a:lstStyle/>
+          <a:p>
+            <a:pPr algn="l">
+              <a:spcAft>
+                <a:spcPts val="0"/>
+              </a:spcAft>
+            </a:pPr>
+            <a:r>
+              <a:rPr sz="1400" b="1" i="0">
+                <a:solidFill>
+                  <a:srgbClr val="8EDBD4"/>
+                </a:solidFill>
+                <a:latin typeface="Arial"/>
+              </a:rPr>
+              <a:t>Size of each term in the integrated momentum equation (m/s, log scale)</a:t>
+            </a:r>
+          </a:p>
+        </p:txBody>
+      </p:sp>
+      <p:cxnSp>
+        <p:nvCxnSpPr>
+          <p:cNvPr id="4" name="C1-E22 line 2" descr="sci-ppt:o002"/>
+          <p:cNvCxnSpPr/>
+          <p:nvPr/>
+        </p:nvCxnSpPr>
+        <p:spPr>
+          <a:xfrm>
+            <a:off x="3108960" y="1554480"/>
+            <a:ext cx="0" cy="2423159"/>
+          </a:xfrm>
+          <a:prstGeom prst="line">
+            <a:avLst/>
+          </a:prstGeom>
+          <a:ln w="10160">
+            <a:solidFill>
+              <a:srgbClr val="2E4756"/>
+            </a:solidFill>
+          </a:ln>
+          <a:effectLst/>
+        </p:spPr>
+      </p:cxnSp>
+      <p:sp>
+        <p:nvSpPr>
+          <p:cNvPr id="5" name="C1-E22 text 3" descr="sci-ppt:o003"/>
+          <p:cNvSpPr txBox="1"/>
+          <p:nvPr/>
+        </p:nvSpPr>
+        <p:spPr>
+          <a:xfrm>
+            <a:off x="2697479" y="4023360"/>
+            <a:ext cx="822960" cy="216153"/>
+          </a:xfrm>
+          <a:prstGeom prst="rect">
+            <a:avLst/>
+          </a:prstGeom>
+          <a:noFill/>
+          <a:effectLst/>
+        </p:spPr>
+        <p:txBody>
+          <a:bodyPr wrap="none" lIns="18288" rIns="18288" tIns="18288" bIns="18288" anchor="t">
+            <a:spAutoFit/>
+          </a:bodyPr>
+          <a:lstStyle/>
+          <a:p>
+            <a:pPr algn="ctr">
+              <a:spcAft>
+                <a:spcPts val="0"/>
+              </a:spcAft>
+            </a:pPr>
+            <a:r>
+              <a:rPr sz="1100" b="0" i="0">
+                <a:solidFill>
+                  <a:srgbClr val="B4C7D2"/>
+                </a:solidFill>
+                <a:latin typeface="Arial"/>
+              </a:rPr>
+              <a:t>10⁻⁵</a:t>
+            </a:r>
+          </a:p>
+        </p:txBody>
+      </p:sp>
+      <p:cxnSp>
+        <p:nvCxnSpPr>
+          <p:cNvPr id="6" name="C1-E22 line 4" descr="sci-ppt:o004"/>
+          <p:cNvCxnSpPr/>
+          <p:nvPr/>
+        </p:nvCxnSpPr>
+        <p:spPr>
+          <a:xfrm>
+            <a:off x="3870960" y="1554480"/>
+            <a:ext cx="0" cy="2423159"/>
+          </a:xfrm>
+          <a:prstGeom prst="line">
+            <a:avLst/>
+          </a:prstGeom>
+          <a:ln w="10160">
+            <a:solidFill>
+              <a:srgbClr val="2E4756"/>
+            </a:solidFill>
+          </a:ln>
+          <a:effectLst/>
+        </p:spPr>
+      </p:cxnSp>
+      <p:sp>
+        <p:nvSpPr>
+          <p:cNvPr id="7" name="C1-E22 text 5" descr="sci-ppt:o005"/>
+          <p:cNvSpPr txBox="1"/>
+          <p:nvPr/>
+        </p:nvSpPr>
+        <p:spPr>
+          <a:xfrm>
+            <a:off x="3459480" y="4023360"/>
+            <a:ext cx="822960" cy="216153"/>
+          </a:xfrm>
+          <a:prstGeom prst="rect">
+            <a:avLst/>
+          </a:prstGeom>
+          <a:noFill/>
+          <a:effectLst/>
+        </p:spPr>
+        <p:txBody>
+          <a:bodyPr wrap="none" lIns="18288" rIns="18288" tIns="18288" bIns="18288" anchor="t">
+            <a:spAutoFit/>
+          </a:bodyPr>
+          <a:lstStyle/>
+          <a:p>
+            <a:pPr algn="ctr">
+              <a:spcAft>
+                <a:spcPts val="0"/>
+              </a:spcAft>
+            </a:pPr>
+            <a:r>
+              <a:rPr sz="1100" b="0" i="0">
+                <a:solidFill>
+                  <a:srgbClr val="B4C7D2"/>
+                </a:solidFill>
+                <a:latin typeface="Arial"/>
+              </a:rPr>
+              <a:t>10⁻⁴</a:t>
+            </a:r>
+          </a:p>
+        </p:txBody>
+      </p:sp>
+      <p:cxnSp>
+        <p:nvCxnSpPr>
+          <p:cNvPr id="8" name="C1-E22 line 6" descr="sci-ppt:o006"/>
+          <p:cNvCxnSpPr/>
+          <p:nvPr/>
+        </p:nvCxnSpPr>
+        <p:spPr>
+          <a:xfrm>
+            <a:off x="4632960" y="1554480"/>
+            <a:ext cx="0" cy="2423159"/>
+          </a:xfrm>
+          <a:prstGeom prst="line">
+            <a:avLst/>
+          </a:prstGeom>
+          <a:ln w="10160">
+            <a:solidFill>
+              <a:srgbClr val="2E4756"/>
+            </a:solidFill>
+          </a:ln>
+          <a:effectLst/>
+        </p:spPr>
+      </p:cxnSp>
+      <p:sp>
+        <p:nvSpPr>
+          <p:cNvPr id="9" name="C1-E22 text 7" descr="sci-ppt:o007"/>
+          <p:cNvSpPr txBox="1"/>
+          <p:nvPr/>
+        </p:nvSpPr>
+        <p:spPr>
+          <a:xfrm>
+            <a:off x="4221480" y="4023360"/>
+            <a:ext cx="822960" cy="216153"/>
+          </a:xfrm>
+          <a:prstGeom prst="rect">
+            <a:avLst/>
+          </a:prstGeom>
+          <a:noFill/>
+          <a:effectLst/>
+        </p:spPr>
+        <p:txBody>
+          <a:bodyPr wrap="none" lIns="18288" rIns="18288" tIns="18288" bIns="18288" anchor="t">
+            <a:spAutoFit/>
+          </a:bodyPr>
+          <a:lstStyle/>
+          <a:p>
+            <a:pPr algn="ctr">
+              <a:spcAft>
+                <a:spcPts val="0"/>
+              </a:spcAft>
+            </a:pPr>
+            <a:r>
+              <a:rPr sz="1100" b="0" i="0">
+                <a:solidFill>
+                  <a:srgbClr val="B4C7D2"/>
+                </a:solidFill>
+                <a:latin typeface="Arial"/>
+              </a:rPr>
+              <a:t>10⁻³</a:t>
+            </a:r>
+          </a:p>
+        </p:txBody>
+      </p:sp>
+      <p:cxnSp>
+        <p:nvCxnSpPr>
+          <p:cNvPr id="10" name="C1-E22 line 8" descr="sci-ppt:o008"/>
+          <p:cNvCxnSpPr/>
+          <p:nvPr/>
+        </p:nvCxnSpPr>
+        <p:spPr>
+          <a:xfrm>
+            <a:off x="5394960" y="1554480"/>
+            <a:ext cx="0" cy="2423159"/>
+          </a:xfrm>
+          <a:prstGeom prst="line">
+            <a:avLst/>
+          </a:prstGeom>
+          <a:ln w="10160">
+            <a:solidFill>
+              <a:srgbClr val="2E4756"/>
+            </a:solidFill>
+          </a:ln>
+          <a:effectLst/>
+        </p:spPr>
+      </p:cxnSp>
+      <p:sp>
+        <p:nvSpPr>
+          <p:cNvPr id="11" name="C1-E22 text 9" descr="sci-ppt:o009"/>
+          <p:cNvSpPr txBox="1"/>
+          <p:nvPr/>
+        </p:nvSpPr>
+        <p:spPr>
+          <a:xfrm>
+            <a:off x="4983480" y="4023360"/>
+            <a:ext cx="822960" cy="216153"/>
+          </a:xfrm>
+          <a:prstGeom prst="rect">
+            <a:avLst/>
+          </a:prstGeom>
+          <a:noFill/>
+          <a:effectLst/>
+        </p:spPr>
+        <p:txBody>
+          <a:bodyPr wrap="none" lIns="18288" rIns="18288" tIns="18288" bIns="18288" anchor="t">
+            <a:spAutoFit/>
+          </a:bodyPr>
+          <a:lstStyle/>
+          <a:p>
+            <a:pPr algn="ctr">
+              <a:spcAft>
+                <a:spcPts val="0"/>
+              </a:spcAft>
+            </a:pPr>
+            <a:r>
+              <a:rPr sz="1100" b="0" i="0">
+                <a:solidFill>
+                  <a:srgbClr val="B4C7D2"/>
+                </a:solidFill>
+                <a:latin typeface="Arial"/>
+              </a:rPr>
+              <a:t>10⁻²</a:t>
+            </a:r>
+          </a:p>
+        </p:txBody>
+      </p:sp>
+      <p:cxnSp>
+        <p:nvCxnSpPr>
+          <p:cNvPr id="12" name="C1-E22 line 10" descr="sci-ppt:o010"/>
+          <p:cNvCxnSpPr/>
+          <p:nvPr/>
+        </p:nvCxnSpPr>
+        <p:spPr>
+          <a:xfrm>
+            <a:off x="6156959" y="1554480"/>
+            <a:ext cx="0" cy="2423159"/>
+          </a:xfrm>
+          <a:prstGeom prst="line">
+            <a:avLst/>
+          </a:prstGeom>
+          <a:ln w="10160">
+            <a:solidFill>
+              <a:srgbClr val="2E4756"/>
+            </a:solidFill>
+          </a:ln>
+          <a:effectLst/>
+        </p:spPr>
+      </p:cxnSp>
+      <p:sp>
+        <p:nvSpPr>
+          <p:cNvPr id="13" name="C1-E22 text 11" descr="sci-ppt:o011"/>
+          <p:cNvSpPr txBox="1"/>
+          <p:nvPr/>
+        </p:nvSpPr>
+        <p:spPr>
+          <a:xfrm>
+            <a:off x="5745479" y="4023360"/>
+            <a:ext cx="822960" cy="216153"/>
+          </a:xfrm>
+          <a:prstGeom prst="rect">
+            <a:avLst/>
+          </a:prstGeom>
+          <a:noFill/>
+          <a:effectLst/>
+        </p:spPr>
+        <p:txBody>
+          <a:bodyPr wrap="none" lIns="18288" rIns="18288" tIns="18288" bIns="18288" anchor="t">
+            <a:spAutoFit/>
+          </a:bodyPr>
+          <a:lstStyle/>
+          <a:p>
+            <a:pPr algn="ctr">
+              <a:spcAft>
+                <a:spcPts val="0"/>
+              </a:spcAft>
+            </a:pPr>
+            <a:r>
+              <a:rPr sz="1100" b="0" i="0">
+                <a:solidFill>
+                  <a:srgbClr val="B4C7D2"/>
+                </a:solidFill>
+                <a:latin typeface="Arial"/>
+              </a:rPr>
+              <a:t>10⁻¹</a:t>
+            </a:r>
+          </a:p>
+        </p:txBody>
+      </p:sp>
+      <p:cxnSp>
+        <p:nvCxnSpPr>
+          <p:cNvPr id="14" name="C1-E22 line 12" descr="sci-ppt:o012"/>
+          <p:cNvCxnSpPr/>
+          <p:nvPr/>
+        </p:nvCxnSpPr>
+        <p:spPr>
+          <a:xfrm>
+            <a:off x="6918960" y="1554480"/>
+            <a:ext cx="0" cy="2423159"/>
+          </a:xfrm>
+          <a:prstGeom prst="line">
+            <a:avLst/>
+          </a:prstGeom>
+          <a:ln w="10160">
+            <a:solidFill>
+              <a:srgbClr val="2E4756"/>
+            </a:solidFill>
+          </a:ln>
+          <a:effectLst/>
+        </p:spPr>
+      </p:cxnSp>
+      <p:sp>
+        <p:nvSpPr>
+          <p:cNvPr id="15" name="C1-E22 text 13" descr="sci-ppt:o013"/>
+          <p:cNvSpPr txBox="1"/>
+          <p:nvPr/>
+        </p:nvSpPr>
+        <p:spPr>
+          <a:xfrm>
+            <a:off x="6507480" y="4023360"/>
+            <a:ext cx="822960" cy="216153"/>
+          </a:xfrm>
+          <a:prstGeom prst="rect">
+            <a:avLst/>
+          </a:prstGeom>
+          <a:noFill/>
+          <a:effectLst/>
+        </p:spPr>
+        <p:txBody>
+          <a:bodyPr wrap="none" lIns="18288" rIns="18288" tIns="18288" bIns="18288" anchor="t">
+            <a:spAutoFit/>
+          </a:bodyPr>
+          <a:lstStyle/>
+          <a:p>
+            <a:pPr algn="ctr">
+              <a:spcAft>
+                <a:spcPts val="0"/>
+              </a:spcAft>
+            </a:pPr>
+            <a:r>
+              <a:rPr sz="1100" b="0" i="0">
+                <a:solidFill>
+                  <a:srgbClr val="B4C7D2"/>
+                </a:solidFill>
+                <a:latin typeface="Arial"/>
+              </a:rPr>
+              <a:t>10⁰</a:t>
+            </a:r>
+          </a:p>
+        </p:txBody>
+      </p:sp>
+      <p:cxnSp>
+        <p:nvCxnSpPr>
+          <p:cNvPr id="16" name="C1-E22 line 14" descr="sci-ppt:o014"/>
+          <p:cNvCxnSpPr/>
+          <p:nvPr/>
+        </p:nvCxnSpPr>
+        <p:spPr>
+          <a:xfrm>
+            <a:off x="7680960" y="1554480"/>
+            <a:ext cx="0" cy="2423159"/>
+          </a:xfrm>
+          <a:prstGeom prst="line">
+            <a:avLst/>
+          </a:prstGeom>
+          <a:ln w="10160">
+            <a:solidFill>
+              <a:srgbClr val="2E4756"/>
+            </a:solidFill>
+          </a:ln>
+          <a:effectLst/>
+        </p:spPr>
+      </p:cxnSp>
+      <p:sp>
+        <p:nvSpPr>
+          <p:cNvPr id="17" name="C1-E22 text 15" descr="sci-ppt:o015"/>
+          <p:cNvSpPr txBox="1"/>
+          <p:nvPr/>
+        </p:nvSpPr>
+        <p:spPr>
+          <a:xfrm>
+            <a:off x="7269480" y="4023360"/>
+            <a:ext cx="822960" cy="216153"/>
+          </a:xfrm>
+          <a:prstGeom prst="rect">
+            <a:avLst/>
+          </a:prstGeom>
+          <a:noFill/>
+          <a:effectLst/>
+        </p:spPr>
+        <p:txBody>
+          <a:bodyPr wrap="none" lIns="18288" rIns="18288" tIns="18288" bIns="18288" anchor="t">
+            <a:spAutoFit/>
+          </a:bodyPr>
+          <a:lstStyle/>
+          <a:p>
+            <a:pPr algn="ctr">
+              <a:spcAft>
+                <a:spcPts val="0"/>
+              </a:spcAft>
+            </a:pPr>
+            <a:r>
+              <a:rPr sz="1100" b="0" i="0">
+                <a:solidFill>
+                  <a:srgbClr val="B4C7D2"/>
+                </a:solidFill>
+                <a:latin typeface="Arial"/>
+              </a:rPr>
+              <a:t>10¹</a:t>
+            </a:r>
+          </a:p>
+        </p:txBody>
+      </p:sp>
+      <p:sp>
+        <p:nvSpPr>
+          <p:cNvPr id="18" name="C1-E22 text 16" descr="sci-ppt:o016"/>
+          <p:cNvSpPr txBox="1"/>
+          <p:nvPr/>
+        </p:nvSpPr>
+        <p:spPr>
+          <a:xfrm>
+            <a:off x="457200" y="1673352"/>
+            <a:ext cx="2560320" cy="417576"/>
+          </a:xfrm>
+          <a:prstGeom prst="rect">
+            <a:avLst/>
+          </a:prstGeom>
+          <a:noFill/>
+          <a:effectLst/>
+        </p:spPr>
+        <p:txBody>
+          <a:bodyPr wrap="none" lIns="18288" rIns="18288" tIns="18288" bIns="18288" anchor="t">
+            <a:spAutoFit/>
+          </a:bodyPr>
+          <a:lstStyle/>
+          <a:p>
+            <a:pPr algn="l">
+              <a:spcAft>
+                <a:spcPts val="0"/>
+              </a:spcAft>
+            </a:pPr>
+            <a:r>
+              <a:rPr sz="1200" b="0" i="0">
+                <a:solidFill>
+                  <a:srgbClr val="E7F0F3"/>
+                </a:solidFill>
+                <a:latin typeface="Arial"/>
+              </a:rPr>
+              <a:t>pressure-impulse term</a:t>
+            </a:r>
+          </a:p>
+          <a:p>
+            <a:pPr algn="l">
+              <a:spcAft>
+                <a:spcPts val="0"/>
+              </a:spcAft>
+            </a:pPr>
+            <a:r>
+              <a:rPr sz="1200" b="0" i="0">
+                <a:solidFill>
+                  <a:srgbClr val="E7F0F3"/>
+                </a:solidFill>
+                <a:latin typeface="Arial"/>
+              </a:rPr>
+              <a:t>Π / (ρL) = Δu</a:t>
+            </a:r>
+          </a:p>
+        </p:txBody>
+      </p:sp>
+      <p:sp>
+        <p:nvSpPr>
+          <p:cNvPr id="19" name="C1-E22 rect 17" descr="sci-ppt:o017"/>
           <p:cNvSpPr/>
           <p:nvPr/>
         </p:nvSpPr>
         <p:spPr>
           <a:xfrm>
-            <a:off x="1219200" y="2194560"/>
-            <a:ext cx="8290560" cy="1463040"/>
+            <a:off x="3108960" y="1737360"/>
+            <a:ext cx="4173566" cy="411480"/>
           </a:xfrm>
           <a:prstGeom prst="rect">
+            <a:avLst/>
+          </a:prstGeom>
+          <a:solidFill>
+            <a:srgbClr val="8EDBD4">
+              <a:alpha val="85000"/>
+            </a:srgbClr>
+          </a:solidFill>
+          <a:ln w="12700">
+            <a:solidFill>
+              <a:srgbClr val="8EDBD4">
+                <a:alpha val="85000"/>
+              </a:srgbClr>
+            </a:solidFill>
+          </a:ln>
+          <a:effectLst/>
+        </p:spPr>
+        <p:txBody>
+          <a:bodyPr rtlCol="0" anchor="ctr"/>
+          <a:lstStyle/>
+          <a:p>
+            <a:pPr algn="ctr"/>
+          </a:p>
+        </p:txBody>
+      </p:sp>
+      <p:sp>
+        <p:nvSpPr>
+          <p:cNvPr id="20" name="C1-E22 text 18" descr="sci-ppt:o018"/>
+          <p:cNvSpPr txBox="1"/>
+          <p:nvPr/>
+        </p:nvSpPr>
+        <p:spPr>
+          <a:xfrm>
+            <a:off x="7355678" y="1783080"/>
+            <a:ext cx="2011680" cy="239395"/>
+          </a:xfrm>
+          <a:prstGeom prst="rect">
+            <a:avLst/>
+          </a:prstGeom>
+          <a:noFill/>
+          <a:effectLst/>
+        </p:spPr>
+        <p:txBody>
+          <a:bodyPr wrap="none" lIns="18288" rIns="18288" tIns="18288" bIns="18288" anchor="t">
+            <a:spAutoFit/>
+          </a:bodyPr>
+          <a:lstStyle/>
+          <a:p>
+            <a:pPr algn="l">
+              <a:spcAft>
+                <a:spcPts val="0"/>
+              </a:spcAft>
+            </a:pPr>
+            <a:r>
+              <a:rPr sz="1250" b="1" i="0">
+                <a:solidFill>
+                  <a:srgbClr val="E7F0F3"/>
+                </a:solidFill>
+                <a:latin typeface="Arial"/>
+              </a:rPr>
+              <a:t>3 m/s</a:t>
+            </a:r>
+          </a:p>
+        </p:txBody>
+      </p:sp>
+      <p:sp>
+        <p:nvSpPr>
+          <p:cNvPr id="21" name="C1-E22 text 19" descr="sci-ppt:o019"/>
+          <p:cNvSpPr txBox="1"/>
+          <p:nvPr/>
+        </p:nvSpPr>
+        <p:spPr>
+          <a:xfrm>
+            <a:off x="457200" y="2450592"/>
+            <a:ext cx="2560320" cy="417576"/>
+          </a:xfrm>
+          <a:prstGeom prst="rect">
+            <a:avLst/>
+          </a:prstGeom>
+          <a:noFill/>
+          <a:effectLst/>
+        </p:spPr>
+        <p:txBody>
+          <a:bodyPr wrap="none" lIns="18288" rIns="18288" tIns="18288" bIns="18288" anchor="t">
+            <a:spAutoFit/>
+          </a:bodyPr>
+          <a:lstStyle/>
+          <a:p>
+            <a:pPr algn="l">
+              <a:spcAft>
+                <a:spcPts val="0"/>
+              </a:spcAft>
+            </a:pPr>
+            <a:r>
+              <a:rPr sz="1200" b="0" i="0">
+                <a:solidFill>
+                  <a:srgbClr val="E7F0F3"/>
+                </a:solidFill>
+                <a:latin typeface="Arial"/>
+              </a:rPr>
+              <a:t>convective impulse</a:t>
+            </a:r>
+          </a:p>
+          <a:p>
+            <a:pPr algn="l">
+              <a:spcAft>
+                <a:spcPts val="0"/>
+              </a:spcAft>
+            </a:pPr>
+            <a:r>
+              <a:rPr sz="1200" b="0" i="0">
+                <a:solidFill>
+                  <a:srgbClr val="E7F0F3"/>
+                </a:solidFill>
+                <a:latin typeface="Arial"/>
+              </a:rPr>
+              <a:t>~ U²τ/L</a:t>
+            </a:r>
+          </a:p>
+        </p:txBody>
+      </p:sp>
+      <p:sp>
+        <p:nvSpPr>
+          <p:cNvPr id="22" name="C1-E22 rect 20" descr="sci-ppt:o020"/>
+          <p:cNvSpPr/>
+          <p:nvPr/>
+        </p:nvSpPr>
+        <p:spPr>
+          <a:xfrm>
+            <a:off x="3108960" y="2514600"/>
+            <a:ext cx="2783747" cy="411480"/>
+          </a:xfrm>
+          <a:prstGeom prst="rect">
+            <a:avLst/>
+          </a:prstGeom>
+          <a:solidFill>
+            <a:srgbClr val="F2B880">
+              <a:alpha val="85000"/>
+            </a:srgbClr>
+          </a:solidFill>
+          <a:ln w="12700">
+            <a:solidFill>
+              <a:srgbClr val="F2B880">
+                <a:alpha val="85000"/>
+              </a:srgbClr>
+            </a:solidFill>
+          </a:ln>
+          <a:effectLst/>
+        </p:spPr>
+        <p:txBody>
+          <a:bodyPr rtlCol="0" anchor="ctr"/>
+          <a:lstStyle/>
+          <a:p>
+            <a:pPr algn="ctr"/>
+          </a:p>
+        </p:txBody>
+      </p:sp>
+      <p:sp>
+        <p:nvSpPr>
+          <p:cNvPr id="23" name="C1-E22 text 21" descr="sci-ppt:o021"/>
+          <p:cNvSpPr txBox="1"/>
+          <p:nvPr/>
+        </p:nvSpPr>
+        <p:spPr>
+          <a:xfrm>
+            <a:off x="5965859" y="2560320"/>
+            <a:ext cx="2011680" cy="239395"/>
+          </a:xfrm>
+          <a:prstGeom prst="rect">
+            <a:avLst/>
+          </a:prstGeom>
+          <a:noFill/>
+          <a:effectLst/>
+        </p:spPr>
+        <p:txBody>
+          <a:bodyPr wrap="none" lIns="18288" rIns="18288" tIns="18288" bIns="18288" anchor="t">
+            <a:spAutoFit/>
+          </a:bodyPr>
+          <a:lstStyle/>
+          <a:p>
+            <a:pPr algn="l">
+              <a:spcAft>
+                <a:spcPts val="0"/>
+              </a:spcAft>
+            </a:pPr>
+            <a:r>
+              <a:rPr sz="1250" b="1" i="0">
+                <a:solidFill>
+                  <a:srgbClr val="E7F0F3"/>
+                </a:solidFill>
+                <a:latin typeface="Arial"/>
+              </a:rPr>
+              <a:t>0.045 m/s</a:t>
+            </a:r>
+          </a:p>
+        </p:txBody>
+      </p:sp>
+      <p:sp>
+        <p:nvSpPr>
+          <p:cNvPr id="24" name="C1-E22 text 22" descr="sci-ppt:o022"/>
+          <p:cNvSpPr txBox="1"/>
+          <p:nvPr/>
+        </p:nvSpPr>
+        <p:spPr>
+          <a:xfrm>
+            <a:off x="457200" y="3227832"/>
+            <a:ext cx="2560320" cy="417576"/>
+          </a:xfrm>
+          <a:prstGeom prst="rect">
+            <a:avLst/>
+          </a:prstGeom>
+          <a:noFill/>
+          <a:effectLst/>
+        </p:spPr>
+        <p:txBody>
+          <a:bodyPr wrap="none" lIns="18288" rIns="18288" tIns="18288" bIns="18288" anchor="t">
+            <a:spAutoFit/>
+          </a:bodyPr>
+          <a:lstStyle/>
+          <a:p>
+            <a:pPr algn="l">
+              <a:spcAft>
+                <a:spcPts val="0"/>
+              </a:spcAft>
+            </a:pPr>
+            <a:r>
+              <a:rPr sz="1200" b="0" i="0">
+                <a:solidFill>
+                  <a:srgbClr val="E7F0F3"/>
+                </a:solidFill>
+                <a:latin typeface="Arial"/>
+              </a:rPr>
+              <a:t>viscous impulse</a:t>
+            </a:r>
+          </a:p>
+          <a:p>
+            <a:pPr algn="l">
+              <a:spcAft>
+                <a:spcPts val="0"/>
+              </a:spcAft>
+            </a:pPr>
+            <a:r>
+              <a:rPr sz="1200" b="0" i="0">
+                <a:solidFill>
+                  <a:srgbClr val="E7F0F3"/>
+                </a:solidFill>
+                <a:latin typeface="Arial"/>
+              </a:rPr>
+              <a:t>~ ν Δu τ/L²</a:t>
+            </a:r>
+          </a:p>
+        </p:txBody>
+      </p:sp>
+      <p:sp>
+        <p:nvSpPr>
+          <p:cNvPr id="25" name="C1-E22 rect 23" descr="sci-ppt:o023"/>
+          <p:cNvSpPr/>
+          <p:nvPr/>
+        </p:nvSpPr>
+        <p:spPr>
+          <a:xfrm>
+            <a:off x="3108960" y="3291839"/>
+            <a:ext cx="896181" cy="411480"/>
+          </a:xfrm>
+          <a:prstGeom prst="rect">
+            <a:avLst/>
+          </a:prstGeom>
+          <a:solidFill>
+            <a:srgbClr val="7FC8F8">
+              <a:alpha val="85000"/>
+            </a:srgbClr>
+          </a:solidFill>
+          <a:ln w="12700">
+            <a:solidFill>
+              <a:srgbClr val="7FC8F8">
+                <a:alpha val="85000"/>
+              </a:srgbClr>
+            </a:solidFill>
+          </a:ln>
+          <a:effectLst/>
+        </p:spPr>
+        <p:txBody>
+          <a:bodyPr rtlCol="0" anchor="ctr"/>
+          <a:lstStyle/>
+          <a:p>
+            <a:pPr algn="ctr"/>
+          </a:p>
+        </p:txBody>
+      </p:sp>
+      <p:sp>
+        <p:nvSpPr>
+          <p:cNvPr id="26" name="C1-E22 text 24" descr="sci-ppt:o024"/>
+          <p:cNvSpPr txBox="1"/>
+          <p:nvPr/>
+        </p:nvSpPr>
+        <p:spPr>
+          <a:xfrm>
+            <a:off x="4078293" y="3337560"/>
+            <a:ext cx="2011680" cy="239395"/>
+          </a:xfrm>
+          <a:prstGeom prst="rect">
+            <a:avLst/>
+          </a:prstGeom>
+          <a:noFill/>
+          <a:effectLst/>
+        </p:spPr>
+        <p:txBody>
+          <a:bodyPr wrap="none" lIns="18288" rIns="18288" tIns="18288" bIns="18288" anchor="t">
+            <a:spAutoFit/>
+          </a:bodyPr>
+          <a:lstStyle/>
+          <a:p>
+            <a:pPr algn="l">
+              <a:spcAft>
+                <a:spcPts val="0"/>
+              </a:spcAft>
+            </a:pPr>
+            <a:r>
+              <a:rPr sz="1250" b="1" i="0">
+                <a:solidFill>
+                  <a:srgbClr val="E7F0F3"/>
+                </a:solidFill>
+                <a:latin typeface="Arial"/>
+              </a:rPr>
+              <a:t>0.00015 m/s</a:t>
+            </a:r>
+          </a:p>
+        </p:txBody>
+      </p:sp>
+      <p:sp>
+        <p:nvSpPr>
+          <p:cNvPr id="27" name="C1-E22 round_rect 25" descr="sci-ppt:o025"/>
+          <p:cNvSpPr/>
+          <p:nvPr/>
+        </p:nvSpPr>
+        <p:spPr>
+          <a:xfrm>
+            <a:off x="8229600" y="1097280"/>
+            <a:ext cx="3611880" cy="3291840"/>
+          </a:xfrm>
+          <a:prstGeom prst="roundRect">
             <a:avLst/>
           </a:prstGeom>
           <a:solidFill>
             <a:srgbClr val="213E4B"/>
           </a:solidFill>
-          <a:ln w="19050">
+          <a:ln w="20320">
             <a:solidFill>
-              <a:srgbClr val="B4C7D2"/>
+              <a:srgbClr val="8EDBD4"/>
             </a:solidFill>
           </a:ln>
           <a:effectLst/>
@@ -3168,84 +4038,16 @@
           </a:p>
         </p:txBody>
       </p:sp>
-      <p:cxnSp>
-        <p:nvCxnSpPr>
-          <p:cNvPr id="4" name="line3" descr="sci-ppt:C1-E22-003"/>
-          <p:cNvCxnSpPr/>
-          <p:nvPr/>
-        </p:nvCxnSpPr>
-        <p:spPr>
-          <a:xfrm>
-            <a:off x="1219200" y="2194560"/>
-            <a:ext cx="8290560" cy="0"/>
-          </a:xfrm>
-          <a:prstGeom prst="line">
-            <a:avLst/>
-          </a:prstGeom>
-          <a:ln w="25400">
-            <a:solidFill>
-              <a:srgbClr val="B4C7D2"/>
-            </a:solidFill>
-          </a:ln>
-          <a:effectLst/>
-        </p:spPr>
-      </p:cxnSp>
-      <p:cxnSp>
-        <p:nvCxnSpPr>
-          <p:cNvPr id="5" name="line4" descr="sci-ppt:C1-E22-004"/>
-          <p:cNvCxnSpPr/>
-          <p:nvPr/>
-        </p:nvCxnSpPr>
-        <p:spPr>
-          <a:xfrm>
-            <a:off x="1219200" y="3657600"/>
-            <a:ext cx="8290560" cy="0"/>
-          </a:xfrm>
-          <a:prstGeom prst="line">
-            <a:avLst/>
-          </a:prstGeom>
-          <a:ln w="25400">
-            <a:solidFill>
-              <a:srgbClr val="B4C7D2"/>
-            </a:solidFill>
-          </a:ln>
-          <a:effectLst/>
-        </p:spPr>
-      </p:cxnSp>
-      <p:cxnSp>
-        <p:nvCxnSpPr>
-          <p:cNvPr id="6" name="arrow5" descr="sci-ppt:C1-E22-005"/>
-          <p:cNvCxnSpPr/>
-          <p:nvPr/>
-        </p:nvCxnSpPr>
-        <p:spPr>
-          <a:xfrm>
-            <a:off x="2316480" y="2926080"/>
-            <a:ext cx="5608319" cy="0"/>
-          </a:xfrm>
-          <a:prstGeom prst="line">
-            <a:avLst/>
-          </a:prstGeom>
-          <a:ln w="25400">
-            <a:solidFill>
-              <a:srgbClr val="8EDBD4"/>
-            </a:solidFill>
-            <a:headEnd type="none" w="med" len="med"/>
-            <a:tailEnd type="triangle" w="med" len="med"/>
-          </a:ln>
-          <a:effectLst/>
-        </p:spPr>
-      </p:cxnSp>
-      <p:sp>
-        <p:nvSpPr>
-          <p:cNvPr id="7" name="text6" descr="sci-ppt:C1-E22-006"/>
+      <p:sp>
+        <p:nvSpPr>
+          <p:cNvPr id="28" name="C1-E22 text 26" descr="sci-ppt:o026"/>
           <p:cNvSpPr txBox="1"/>
           <p:nvPr/>
         </p:nvSpPr>
         <p:spPr>
           <a:xfrm>
-            <a:off x="1402080" y="1463040"/>
-            <a:ext cx="3657600" cy="377952"/>
+            <a:off x="8339327" y="1152144"/>
+            <a:ext cx="3392424" cy="247142"/>
           </a:xfrm>
           <a:prstGeom prst="rect">
             <a:avLst/>
@@ -3254,7 +4056,7 @@
           <a:effectLst/>
         </p:spPr>
         <p:txBody>
-          <a:bodyPr wrap="none" lIns="27432" rIns="27432" tIns="18288" bIns="18288" anchor="ctr">
+          <a:bodyPr wrap="none" lIns="18288" rIns="18288" tIns="18288" bIns="18288" anchor="t">
             <a:spAutoFit/>
           </a:bodyPr>
           <a:lstStyle/>
@@ -3265,27 +4067,27 @@
               </a:spcAft>
             </a:pPr>
             <a:r>
-              <a:rPr sz="1920" b="0" i="0">
-                <a:solidFill>
-                  <a:srgbClr val="E7F0F3"/>
+              <a:rPr sz="1300" b="1" i="0">
+                <a:solidFill>
+                  <a:srgbClr val="8EDBD4"/>
                 </a:solidFill>
                 <a:latin typeface="Arial"/>
               </a:rPr>
-              <a:t>Π0 at z = 0</a:t>
-            </a:r>
-          </a:p>
-        </p:txBody>
-      </p:sp>
-      <p:sp>
-        <p:nvSpPr>
-          <p:cNvPr id="8" name="text7" descr="sci-ppt:C1-E22-007"/>
+              <a:t>Why the short-event model works</a:t>
+            </a:r>
+          </a:p>
+        </p:txBody>
+      </p:sp>
+      <p:sp>
+        <p:nvSpPr>
+          <p:cNvPr id="29" name="C1-E22 text 27" descr="sci-ppt:o027"/>
           <p:cNvSpPr txBox="1"/>
           <p:nvPr/>
         </p:nvSpPr>
         <p:spPr>
           <a:xfrm>
-            <a:off x="7315200" y="1463040"/>
-            <a:ext cx="4267200" cy="377952"/>
+            <a:off x="8366760" y="1554480"/>
+            <a:ext cx="3383280" cy="239395"/>
           </a:xfrm>
           <a:prstGeom prst="rect">
             <a:avLst/>
@@ -3294,7 +4096,7 @@
           <a:effectLst/>
         </p:spPr>
         <p:txBody>
-          <a:bodyPr wrap="none" lIns="27432" rIns="27432" tIns="18288" bIns="18288" anchor="ctr">
+          <a:bodyPr wrap="none" lIns="18288" rIns="18288" tIns="18288" bIns="18288" anchor="t">
             <a:spAutoFit/>
           </a:bodyPr>
           <a:lstStyle/>
@@ -3305,27 +4107,27 @@
               </a:spcAft>
             </a:pPr>
             <a:r>
-              <a:rPr sz="1920" b="0" i="0">
+              <a:rPr sz="1250" b="1" i="0">
                 <a:solidFill>
                   <a:srgbClr val="E7F0F3"/>
                 </a:solidFill>
                 <a:latin typeface="Arial"/>
               </a:rPr>
-              <a:t>Π = 0 at z = L</a:t>
-            </a:r>
-          </a:p>
-        </p:txBody>
-      </p:sp>
-      <p:sp>
-        <p:nvSpPr>
-          <p:cNvPr id="9" name="text8" descr="sci-ppt:C1-E22-008"/>
+              <a:t>Δu = −∇Π/ρ − ∫(u·∇)u dt + ν∫∇²u dt</a:t>
+            </a:r>
+          </a:p>
+        </p:txBody>
+      </p:sp>
+      <p:sp>
+        <p:nvSpPr>
+          <p:cNvPr id="30" name="C1-E22 text 28" descr="sci-ppt:o028"/>
           <p:cNvSpPr txBox="1"/>
           <p:nvPr/>
         </p:nvSpPr>
         <p:spPr>
           <a:xfrm>
-            <a:off x="3108960" y="2987040"/>
-            <a:ext cx="4876800" cy="359054"/>
+            <a:off x="8567928" y="2286000"/>
+            <a:ext cx="3182112" cy="417576"/>
           </a:xfrm>
           <a:prstGeom prst="rect">
             <a:avLst/>
@@ -3334,7 +4136,7 @@
           <a:effectLst/>
         </p:spPr>
         <p:txBody>
-          <a:bodyPr wrap="none" lIns="27432" rIns="27432" tIns="18288" bIns="18288" anchor="ctr">
+          <a:bodyPr wrap="none" lIns="18288" rIns="18288" tIns="18288" bIns="18288" anchor="t">
             <a:spAutoFit/>
           </a:bodyPr>
           <a:lstStyle/>
@@ -3345,27 +4147,75 @@
               </a:spcAft>
             </a:pPr>
             <a:r>
-              <a:rPr sz="1823" b="0" i="0">
+              <a:rPr sz="1200" b="0" i="0">
                 <a:solidFill>
                   <a:srgbClr val="E7F0F3"/>
                 </a:solidFill>
                 <a:latin typeface="Arial"/>
               </a:rPr>
-              <a:t>Δ u_z toward outlet</a:t>
-            </a:r>
-          </a:p>
-        </p:txBody>
-      </p:sp>
-      <p:sp>
-        <p:nvSpPr>
-          <p:cNvPr id="10" name="text9" descr="sci-ppt:C1-E22-009"/>
+              <a:t>Uτ/L = 0.015: convection moves the</a:t>
+            </a:r>
+          </a:p>
+          <a:p>
+            <a:pPr algn="l">
+              <a:spcAft>
+                <a:spcPts val="0"/>
+              </a:spcAft>
+            </a:pPr>
+            <a:r>
+              <a:rPr sz="1200" b="0" i="0">
+                <a:solidFill>
+                  <a:srgbClr val="E7F0F3"/>
+                </a:solidFill>
+                <a:latin typeface="Arial"/>
+              </a:rPr>
+              <a:t>fluid only 1.5 % of L.</a:t>
+            </a:r>
+          </a:p>
+        </p:txBody>
+      </p:sp>
+      <p:sp>
+        <p:nvSpPr>
+          <p:cNvPr id="31" name="C1-E22 ellipse 29" descr="sci-ppt:o029"/>
+          <p:cNvSpPr/>
+          <p:nvPr/>
+        </p:nvSpPr>
+        <p:spPr>
+          <a:xfrm>
+            <a:off x="8398764" y="2339340"/>
+            <a:ext cx="82296" cy="82296"/>
+          </a:xfrm>
+          <a:prstGeom prst="ellipse">
+            <a:avLst/>
+          </a:prstGeom>
+          <a:solidFill>
+            <a:srgbClr val="8EDBD4"/>
+          </a:solidFill>
+          <a:ln w="12700">
+            <a:solidFill>
+              <a:srgbClr val="8EDBD4"/>
+            </a:solidFill>
+          </a:ln>
+          <a:effectLst/>
+        </p:spPr>
+        <p:txBody>
+          <a:bodyPr rtlCol="0" anchor="ctr"/>
+          <a:lstStyle/>
+          <a:p>
+            <a:pPr algn="ctr"/>
+          </a:p>
+        </p:txBody>
+      </p:sp>
+      <p:sp>
+        <p:nvSpPr>
+          <p:cNvPr id="32" name="C1-E22 text 30" descr="sci-ppt:o030"/>
           <p:cNvSpPr txBox="1"/>
           <p:nvPr/>
         </p:nvSpPr>
         <p:spPr>
           <a:xfrm>
-            <a:off x="2255520" y="4084320"/>
-            <a:ext cx="9022080" cy="359054"/>
+            <a:off x="8567928" y="2749295"/>
+            <a:ext cx="3182112" cy="417576"/>
           </a:xfrm>
           <a:prstGeom prst="rect">
             <a:avLst/>
@@ -3374,7 +4224,7 @@
           <a:effectLst/>
         </p:spPr>
         <p:txBody>
-          <a:bodyPr wrap="none" lIns="27432" rIns="27432" tIns="18288" bIns="18288" anchor="ctr">
+          <a:bodyPr wrap="none" lIns="18288" rIns="18288" tIns="18288" bIns="18288" anchor="t">
             <a:spAutoFit/>
           </a:bodyPr>
           <a:lstStyle/>
@@ -3385,27 +4235,75 @@
               </a:spcAft>
             </a:pPr>
             <a:r>
-              <a:rPr sz="1823" b="0" i="0">
+              <a:rPr sz="1200" b="0" i="0">
                 <a:solidFill>
                   <a:srgbClr val="E7F0F3"/>
                 </a:solidFill>
                 <a:latin typeface="Arial"/>
               </a:rPr>
-              <a:t>Pressure impulse gradient drives early acceleration.</a:t>
-            </a:r>
-          </a:p>
-        </p:txBody>
-      </p:sp>
-      <p:sp>
-        <p:nvSpPr>
-          <p:cNvPr id="11" name="text10" descr="sci-ppt:C1-E22-010"/>
+              <a:t>ντ/L² = 5×10⁻⁵: viscosity has no time</a:t>
+            </a:r>
+          </a:p>
+          <a:p>
+            <a:pPr algn="l">
+              <a:spcAft>
+                <a:spcPts val="0"/>
+              </a:spcAft>
+            </a:pPr>
+            <a:r>
+              <a:rPr sz="1200" b="0" i="0">
+                <a:solidFill>
+                  <a:srgbClr val="E7F0F3"/>
+                </a:solidFill>
+                <a:latin typeface="Arial"/>
+              </a:rPr>
+              <a:t>to act.</a:t>
+            </a:r>
+          </a:p>
+        </p:txBody>
+      </p:sp>
+      <p:sp>
+        <p:nvSpPr>
+          <p:cNvPr id="33" name="C1-E22 ellipse 31" descr="sci-ppt:o031"/>
+          <p:cNvSpPr/>
+          <p:nvPr/>
+        </p:nvSpPr>
+        <p:spPr>
+          <a:xfrm>
+            <a:off x="8398764" y="2802636"/>
+            <a:ext cx="82296" cy="82296"/>
+          </a:xfrm>
+          <a:prstGeom prst="ellipse">
+            <a:avLst/>
+          </a:prstGeom>
+          <a:solidFill>
+            <a:srgbClr val="8EDBD4"/>
+          </a:solidFill>
+          <a:ln w="12700">
+            <a:solidFill>
+              <a:srgbClr val="8EDBD4"/>
+            </a:solidFill>
+          </a:ln>
+          <a:effectLst/>
+        </p:spPr>
+        <p:txBody>
+          <a:bodyPr rtlCol="0" anchor="ctr"/>
+          <a:lstStyle/>
+          <a:p>
+            <a:pPr algn="ctr"/>
+          </a:p>
+        </p:txBody>
+      </p:sp>
+      <p:sp>
+        <p:nvSpPr>
+          <p:cNvPr id="34" name="C1-E22 text 32" descr="sci-ppt:o032"/>
           <p:cNvSpPr txBox="1"/>
           <p:nvPr/>
         </p:nvSpPr>
         <p:spPr>
           <a:xfrm>
-            <a:off x="365760" y="4974336"/>
-            <a:ext cx="5547360" cy="321259"/>
+            <a:off x="8567928" y="3212591"/>
+            <a:ext cx="3182112" cy="231648"/>
           </a:xfrm>
           <a:prstGeom prst="rect">
             <a:avLst/>
@@ -3414,7 +4312,7 @@
           <a:effectLst/>
         </p:spPr>
         <p:txBody>
-          <a:bodyPr wrap="none" lIns="27432" rIns="27432" tIns="18288" bIns="18288" anchor="ctr">
+          <a:bodyPr wrap="none" lIns="18288" rIns="18288" tIns="18288" bIns="18288" anchor="t">
             <a:spAutoFit/>
           </a:bodyPr>
           <a:lstStyle/>
@@ -3425,27 +4323,59 @@
               </a:spcAft>
             </a:pPr>
             <a:r>
-              <a:rPr sz="1632" b="0" i="0">
+              <a:rPr sz="1200" b="0" i="0">
                 <a:solidFill>
                   <a:srgbClr val="E7F0F3"/>
                 </a:solidFill>
                 <a:latin typeface="Arial"/>
               </a:rPr>
-              <a:t>Δu</a:t>
-            </a:r>
-          </a:p>
-        </p:txBody>
-      </p:sp>
-      <p:sp>
-        <p:nvSpPr>
-          <p:cNvPr id="12" name="text11" descr="sci-ppt:C1-E22-011"/>
+              <a:t>Dropping both leaves Δu ≃ −∇Π/ρ.</a:t>
+            </a:r>
+          </a:p>
+        </p:txBody>
+      </p:sp>
+      <p:sp>
+        <p:nvSpPr>
+          <p:cNvPr id="35" name="C1-E22 ellipse 33" descr="sci-ppt:o033"/>
+          <p:cNvSpPr/>
+          <p:nvPr/>
+        </p:nvSpPr>
+        <p:spPr>
+          <a:xfrm>
+            <a:off x="8398764" y="3265931"/>
+            <a:ext cx="82296" cy="82296"/>
+          </a:xfrm>
+          <a:prstGeom prst="ellipse">
+            <a:avLst/>
+          </a:prstGeom>
+          <a:solidFill>
+            <a:srgbClr val="8EDBD4"/>
+          </a:solidFill>
+          <a:ln w="12700">
+            <a:solidFill>
+              <a:srgbClr val="8EDBD4"/>
+            </a:solidFill>
+          </a:ln>
+          <a:effectLst/>
+        </p:spPr>
+        <p:txBody>
+          <a:bodyPr rtlCol="0" anchor="ctr"/>
+          <a:lstStyle/>
+          <a:p>
+            <a:pPr algn="ctr"/>
+          </a:p>
+        </p:txBody>
+      </p:sp>
+      <p:sp>
+        <p:nvSpPr>
+          <p:cNvPr id="36" name="C1-E22 text 34" descr="sci-ppt:o034"/>
           <p:cNvSpPr txBox="1"/>
           <p:nvPr/>
         </p:nvSpPr>
         <p:spPr>
           <a:xfrm>
-            <a:off x="365760" y="5266944"/>
-            <a:ext cx="5547360" cy="321259"/>
+            <a:off x="457200" y="4434840"/>
+            <a:ext cx="11338560" cy="464057"/>
           </a:xfrm>
           <a:prstGeom prst="rect">
             <a:avLst/>
@@ -3454,7 +4384,7 @@
           <a:effectLst/>
         </p:spPr>
         <p:txBody>
-          <a:bodyPr wrap="none" lIns="27432" rIns="27432" tIns="18288" bIns="18288" anchor="ctr">
+          <a:bodyPr wrap="none" lIns="18288" rIns="18288" tIns="18288" bIns="18288" anchor="t">
             <a:spAutoFit/>
           </a:bodyPr>
           <a:lstStyle/>
@@ -3465,27 +4395,43 @@
               </a:spcAft>
             </a:pPr>
             <a:r>
-              <a:rPr sz="1632" b="0" i="0">
+              <a:rPr sz="1350" b="0" i="0">
                 <a:solidFill>
                   <a:srgbClr val="E7F0F3"/>
                 </a:solidFill>
                 <a:latin typeface="Arial"/>
               </a:rPr>
-              <a:t>u(x,t)</a:t>
-            </a:r>
-          </a:p>
-        </p:txBody>
-      </p:sp>
-      <p:sp>
-        <p:nvSpPr>
-          <p:cNvPr id="13" name="text12" descr="sci-ppt:C1-E22-012"/>
+              <a:t>Bars start at 10⁻⁵ m/s. If either small ratio were near 1, the corresponding bar would be as long as the first and the</a:t>
+            </a:r>
+          </a:p>
+          <a:p>
+            <a:pPr algn="l">
+              <a:spcAft>
+                <a:spcPts val="0"/>
+              </a:spcAft>
+            </a:pPr>
+            <a:r>
+              <a:rPr sz="1350" b="0" i="0">
+                <a:solidFill>
+                  <a:srgbClr val="E7F0F3"/>
+                </a:solidFill>
+                <a:latin typeface="Arial"/>
+              </a:rPr>
+              <a:t>reduced model would fail.</a:t>
+            </a:r>
+          </a:p>
+        </p:txBody>
+      </p:sp>
+      <p:sp>
+        <p:nvSpPr>
+          <p:cNvPr id="37" name="C1-E22 text 35" descr="sci-ppt:o035"/>
           <p:cNvSpPr txBox="1"/>
           <p:nvPr/>
         </p:nvSpPr>
         <p:spPr>
           <a:xfrm>
-            <a:off x="365760" y="5559552"/>
-            <a:ext cx="5547360" cy="321259"/>
+            <a:off x="457200" y="5349240"/>
+            <a:ext cx="11338560" cy="239395"/>
           </a:xfrm>
           <a:prstGeom prst="rect">
             <a:avLst/>
@@ -3494,7 +4440,7 @@
           <a:effectLst/>
         </p:spPr>
         <p:txBody>
-          <a:bodyPr wrap="none" lIns="27432" rIns="27432" tIns="18288" bIns="18288" anchor="ctr">
+          <a:bodyPr wrap="none" lIns="18288" rIns="18288" tIns="18288" bIns="18288" anchor="t">
             <a:spAutoFit/>
           </a:bodyPr>
           <a:lstStyle/>
@@ -3505,27 +4451,27 @@
               </a:spcAft>
             </a:pPr>
             <a:r>
-              <a:rPr sz="1632" b="0" i="0">
-                <a:solidFill>
-                  <a:srgbClr val="E7F0F3"/>
+              <a:rPr sz="1250" b="0" i="0">
+                <a:solidFill>
+                  <a:srgbClr val="B4C7D2"/>
                 </a:solidFill>
                 <a:latin typeface="Arial"/>
               </a:rPr>
-              <a:t>μ</a:t>
-            </a:r>
-          </a:p>
-        </p:txBody>
-      </p:sp>
-      <p:sp>
-        <p:nvSpPr>
-          <p:cNvPr id="14" name="text13" descr="sci-ppt:C1-E22-013"/>
+              <a:t>Teaching case: Π₀ = 0.30 Pa·s, ρ = 1000 kg/m³, L = 100 µm, τ = 0.5 µs, ν = 10⁻⁶ m²/s.</a:t>
+            </a:r>
+          </a:p>
+        </p:txBody>
+      </p:sp>
+      <p:sp>
+        <p:nvSpPr>
+          <p:cNvPr id="38" name="C1-E22 text 36" descr="sci-ppt:o036"/>
           <p:cNvSpPr txBox="1"/>
           <p:nvPr/>
         </p:nvSpPr>
         <p:spPr>
           <a:xfrm>
-            <a:off x="365760" y="5852160"/>
-            <a:ext cx="5547360" cy="321259"/>
+            <a:off x="320040" y="6510528"/>
+            <a:ext cx="11521440" cy="200660"/>
           </a:xfrm>
           <a:prstGeom prst="rect">
             <a:avLst/>
@@ -3534,7 +4480,7 @@
           <a:effectLst/>
         </p:spPr>
         <p:txBody>
-          <a:bodyPr wrap="none" lIns="27432" rIns="27432" tIns="18288" bIns="18288" anchor="ctr">
+          <a:bodyPr wrap="none" lIns="18288" rIns="18288" tIns="18288" bIns="18288" anchor="t">
             <a:spAutoFit/>
           </a:bodyPr>
           <a:lstStyle/>
@@ -3545,253 +4491,13 @@
               </a:spcAft>
             </a:pPr>
             <a:r>
-              <a:rPr sz="1632" b="0" i="0">
-                <a:solidFill>
-                  <a:srgbClr val="E7F0F3"/>
+              <a:rPr sz="1000" b="0" i="0">
+                <a:solidFill>
+                  <a:srgbClr val="B4C7D2"/>
                 </a:solidFill>
                 <a:latin typeface="Arial"/>
               </a:rPr>
-              <a:t>t₀ → t₁</a:t>
-            </a:r>
-          </a:p>
-        </p:txBody>
-      </p:sp>
-      <p:sp>
-        <p:nvSpPr>
-          <p:cNvPr id="15" name="text14" descr="sci-ppt:C1-E22-014"/>
-          <p:cNvSpPr txBox="1"/>
-          <p:nvPr/>
-        </p:nvSpPr>
-        <p:spPr>
-          <a:xfrm>
-            <a:off x="365760" y="6144768"/>
-            <a:ext cx="5547360" cy="321259"/>
-          </a:xfrm>
-          <a:prstGeom prst="rect">
-            <a:avLst/>
-          </a:prstGeom>
-          <a:noFill/>
-          <a:effectLst/>
-        </p:spPr>
-        <p:txBody>
-          <a:bodyPr wrap="none" lIns="27432" rIns="27432" tIns="18288" bIns="18288" anchor="ctr">
-            <a:spAutoFit/>
-          </a:bodyPr>
-          <a:lstStyle/>
-          <a:p>
-            <a:pPr algn="l">
-              <a:spcAft>
-                <a:spcPts val="0"/>
-              </a:spcAft>
-            </a:pPr>
-            <a:r>
-              <a:rPr sz="1632" b="0" i="0">
-                <a:solidFill>
-                  <a:srgbClr val="E7F0F3"/>
-                </a:solidFill>
-                <a:latin typeface="Arial"/>
-              </a:rPr>
-              <a:t>Viscous impulse</a:t>
-            </a:r>
-          </a:p>
-        </p:txBody>
-      </p:sp>
-      <p:sp>
-        <p:nvSpPr>
-          <p:cNvPr id="16" name="text15" descr="sci-ppt:C1-E22-015"/>
-          <p:cNvSpPr txBox="1"/>
-          <p:nvPr/>
-        </p:nvSpPr>
-        <p:spPr>
-          <a:xfrm>
-            <a:off x="6156960" y="4974336"/>
-            <a:ext cx="5547360" cy="321259"/>
-          </a:xfrm>
-          <a:prstGeom prst="rect">
-            <a:avLst/>
-          </a:prstGeom>
-          <a:noFill/>
-          <a:effectLst/>
-        </p:spPr>
-        <p:txBody>
-          <a:bodyPr wrap="none" lIns="27432" rIns="27432" tIns="18288" bIns="18288" anchor="ctr">
-            <a:spAutoFit/>
-          </a:bodyPr>
-          <a:lstStyle/>
-          <a:p>
-            <a:pPr algn="l">
-              <a:spcAft>
-                <a:spcPts val="0"/>
-              </a:spcAft>
-            </a:pPr>
-            <a:r>
-              <a:rPr sz="1632" b="0" i="0">
-                <a:solidFill>
-                  <a:srgbClr val="E7F0F3"/>
-                </a:solidFill>
-                <a:latin typeface="Arial"/>
-              </a:rPr>
-              <a:t>−∇Π/ρ</a:t>
-            </a:r>
-          </a:p>
-        </p:txBody>
-      </p:sp>
-      <p:sp>
-        <p:nvSpPr>
-          <p:cNvPr id="17" name="text16" descr="sci-ppt:C1-E22-016"/>
-          <p:cNvSpPr txBox="1"/>
-          <p:nvPr/>
-        </p:nvSpPr>
-        <p:spPr>
-          <a:xfrm>
-            <a:off x="6156960" y="5266944"/>
-            <a:ext cx="5547360" cy="321259"/>
-          </a:xfrm>
-          <a:prstGeom prst="rect">
-            <a:avLst/>
-          </a:prstGeom>
-          <a:noFill/>
-          <a:effectLst/>
-        </p:spPr>
-        <p:txBody>
-          <a:bodyPr wrap="none" lIns="27432" rIns="27432" tIns="18288" bIns="18288" anchor="ctr">
-            <a:spAutoFit/>
-          </a:bodyPr>
-          <a:lstStyle/>
-          <a:p>
-            <a:pPr algn="l">
-              <a:spcAft>
-                <a:spcPts val="0"/>
-              </a:spcAft>
-            </a:pPr>
-            <a:r>
-              <a:rPr sz="1632" b="0" i="0">
-                <a:solidFill>
-                  <a:srgbClr val="E7F0F3"/>
-                </a:solidFill>
-                <a:latin typeface="Arial"/>
-              </a:rPr>
-              <a:t>ρ</a:t>
-            </a:r>
-          </a:p>
-        </p:txBody>
-      </p:sp>
-      <p:sp>
-        <p:nvSpPr>
-          <p:cNvPr id="18" name="text17" descr="sci-ppt:C1-E22-017"/>
-          <p:cNvSpPr txBox="1"/>
-          <p:nvPr/>
-        </p:nvSpPr>
-        <p:spPr>
-          <a:xfrm>
-            <a:off x="6156960" y="5559552"/>
-            <a:ext cx="5547360" cy="321259"/>
-          </a:xfrm>
-          <a:prstGeom prst="rect">
-            <a:avLst/>
-          </a:prstGeom>
-          <a:noFill/>
-          <a:effectLst/>
-        </p:spPr>
-        <p:txBody>
-          <a:bodyPr wrap="none" lIns="27432" rIns="27432" tIns="18288" bIns="18288" anchor="ctr">
-            <a:spAutoFit/>
-          </a:bodyPr>
-          <a:lstStyle/>
-          <a:p>
-            <a:pPr algn="l">
-              <a:spcAft>
-                <a:spcPts val="0"/>
-              </a:spcAft>
-            </a:pPr>
-            <a:r>
-              <a:rPr sz="1632" b="0" i="0">
-                <a:solidFill>
-                  <a:srgbClr val="E7F0F3"/>
-                </a:solidFill>
-                <a:latin typeface="Arial"/>
-              </a:rPr>
-              <a:t>ν = μ/ρ</a:t>
-            </a:r>
-          </a:p>
-        </p:txBody>
-      </p:sp>
-      <p:sp>
-        <p:nvSpPr>
-          <p:cNvPr id="19" name="text18" descr="sci-ppt:C1-E22-018"/>
-          <p:cNvSpPr txBox="1"/>
-          <p:nvPr/>
-        </p:nvSpPr>
-        <p:spPr>
-          <a:xfrm>
-            <a:off x="6156960" y="5852160"/>
-            <a:ext cx="5547360" cy="321259"/>
-          </a:xfrm>
-          <a:prstGeom prst="rect">
-            <a:avLst/>
-          </a:prstGeom>
-          <a:noFill/>
-          <a:effectLst/>
-        </p:spPr>
-        <p:txBody>
-          <a:bodyPr wrap="none" lIns="27432" rIns="27432" tIns="18288" bIns="18288" anchor="ctr">
-            <a:spAutoFit/>
-          </a:bodyPr>
-          <a:lstStyle/>
-          <a:p>
-            <a:pPr algn="l">
-              <a:spcAft>
-                <a:spcPts val="0"/>
-              </a:spcAft>
-            </a:pPr>
-            <a:r>
-              <a:rPr sz="1632" b="0" i="0">
-                <a:solidFill>
-                  <a:srgbClr val="E7F0F3"/>
-                </a:solidFill>
-                <a:latin typeface="Arial"/>
-              </a:rPr>
-              <a:t>Convective impulse</a:t>
-            </a:r>
-          </a:p>
-        </p:txBody>
-      </p:sp>
-      <p:sp>
-        <p:nvSpPr>
-          <p:cNvPr id="20" name="text19" descr="sci-ppt:C1-E22-019"/>
-          <p:cNvSpPr txBox="1"/>
-          <p:nvPr/>
-        </p:nvSpPr>
-        <p:spPr>
-          <a:xfrm>
-            <a:off x="365760" y="6632448"/>
-            <a:ext cx="11277600" cy="302361"/>
-          </a:xfrm>
-          <a:prstGeom prst="rect">
-            <a:avLst/>
-          </a:prstGeom>
-          <a:noFill/>
-          <a:effectLst/>
-        </p:spPr>
-        <p:txBody>
-          <a:bodyPr wrap="none" lIns="27432" rIns="27432" tIns="18288" bIns="18288" anchor="ctr">
-            <a:spAutoFit/>
-          </a:bodyPr>
-          <a:lstStyle/>
-          <a:p>
-            <a:pPr algn="l">
-              <a:spcAft>
-                <a:spcPts val="0"/>
-              </a:spcAft>
-            </a:pPr>
-            <a:r>
-              <a:rPr sz="1536" b="0" i="0">
-                <a:solidFill>
-                  <a:srgbClr val="B4C7D2"/>
-                </a:solidFill>
-                <a:latin typeface="Arial"/>
-              </a:rPr>
-              <a:t>Pressure-gradient impulse shares momentum change with two residual terms</a:t>
+              <a:t>Magnitudes from Eq. C1-E22 using the numbers of Eq. C1-E25.</a:t>
             </a:r>
           </a:p>
         </p:txBody>

--- a/assets/figures-editable/c1-c2/c1-e22.pptx
+++ b/assets/figures-editable/c1-c2/c1-e22.pptx
@@ -3131,48 +3131,172 @@
                 </a:solidFill>
                 <a:latin typeface="Arial"/>
               </a:rPr>
-              <a:t>C1-E22 · Exact fixed-position integrated incompressible momentum</a:t>
-            </a:r>
-          </a:p>
-        </p:txBody>
-      </p:sp>
-      <p:sp>
-        <p:nvSpPr>
-          <p:cNvPr id="3" name="C1-E22 text 1" descr="sci-ppt:o001"/>
-          <p:cNvSpPr txBox="1"/>
+              <a:t>C1-E22 · Short-event reduced pressure-impulse model</a:t>
+            </a:r>
+          </a:p>
+        </p:txBody>
+      </p:sp>
+      <p:sp>
+        <p:nvSpPr>
+          <p:cNvPr id="3" name="C1-E22 polygon 1" descr="sci-ppt:o001"/>
+          <p:cNvSpPr/>
           <p:nvPr/>
         </p:nvSpPr>
         <p:spPr>
           <a:xfrm>
-            <a:off x="457200" y="914400"/>
-            <a:ext cx="7132320" cy="262636"/>
-          </a:xfrm>
-          <a:prstGeom prst="rect">
+            <a:off x="1005840" y="1097280"/>
+            <a:ext cx="4572000" cy="4572000"/>
+          </a:xfrm>
+          <a:custGeom>
             <a:avLst/>
-          </a:prstGeom>
-          <a:noFill/>
+            <a:gdLst/>
+            <a:ahLst/>
+            <a:cxnLst/>
+            <a:rect l="l" t="t" r="r" b="b"/>
+            <a:pathLst>
+              <a:path w="4572000" h="4572000">
+                <a:moveTo>
+                  <a:pt x="0" y="4572000"/>
+                </a:moveTo>
+                <a:lnTo>
+                  <a:pt x="4572000" y="4572000"/>
+                </a:lnTo>
+                <a:lnTo>
+                  <a:pt x="4568292" y="4387904"/>
+                </a:lnTo>
+                <a:lnTo>
+                  <a:pt x="4557174" y="4204106"/>
+                </a:lnTo>
+                <a:lnTo>
+                  <a:pt x="4538664" y="4020906"/>
+                </a:lnTo>
+                <a:lnTo>
+                  <a:pt x="4512793" y="3838599"/>
+                </a:lnTo>
+                <a:lnTo>
+                  <a:pt x="4479602" y="3657482"/>
+                </a:lnTo>
+                <a:lnTo>
+                  <a:pt x="4439145" y="3477848"/>
+                </a:lnTo>
+                <a:lnTo>
+                  <a:pt x="4391488" y="3299989"/>
+                </a:lnTo>
+                <a:lnTo>
+                  <a:pt x="4336708" y="3124193"/>
+                </a:lnTo>
+                <a:lnTo>
+                  <a:pt x="4274894" y="2950746"/>
+                </a:lnTo>
+                <a:lnTo>
+                  <a:pt x="4206146" y="2779928"/>
+                </a:lnTo>
+                <a:lnTo>
+                  <a:pt x="4130575" y="2612017"/>
+                </a:lnTo>
+                <a:lnTo>
+                  <a:pt x="4048304" y="2447285"/>
+                </a:lnTo>
+                <a:lnTo>
+                  <a:pt x="3959468" y="2286000"/>
+                </a:lnTo>
+                <a:lnTo>
+                  <a:pt x="3864209" y="2128422"/>
+                </a:lnTo>
+                <a:lnTo>
+                  <a:pt x="3762682" y="1974807"/>
+                </a:lnTo>
+                <a:lnTo>
+                  <a:pt x="3655052" y="1825406"/>
+                </a:lnTo>
+                <a:lnTo>
+                  <a:pt x="3541493" y="1680459"/>
+                </a:lnTo>
+                <a:lnTo>
+                  <a:pt x="3422191" y="1540203"/>
+                </a:lnTo>
+                <a:lnTo>
+                  <a:pt x="3297337" y="1404864"/>
+                </a:lnTo>
+                <a:lnTo>
+                  <a:pt x="3167135" y="1274662"/>
+                </a:lnTo>
+                <a:lnTo>
+                  <a:pt x="3031796" y="1149808"/>
+                </a:lnTo>
+                <a:lnTo>
+                  <a:pt x="2891540" y="1030506"/>
+                </a:lnTo>
+                <a:lnTo>
+                  <a:pt x="2746593" y="916947"/>
+                </a:lnTo>
+                <a:lnTo>
+                  <a:pt x="2597192" y="809317"/>
+                </a:lnTo>
+                <a:lnTo>
+                  <a:pt x="2443577" y="707790"/>
+                </a:lnTo>
+                <a:lnTo>
+                  <a:pt x="2286000" y="612531"/>
+                </a:lnTo>
+                <a:lnTo>
+                  <a:pt x="2124714" y="523695"/>
+                </a:lnTo>
+                <a:lnTo>
+                  <a:pt x="1959982" y="441424"/>
+                </a:lnTo>
+                <a:lnTo>
+                  <a:pt x="1792071" y="365853"/>
+                </a:lnTo>
+                <a:lnTo>
+                  <a:pt x="1621253" y="297105"/>
+                </a:lnTo>
+                <a:lnTo>
+                  <a:pt x="1447806" y="235291"/>
+                </a:lnTo>
+                <a:lnTo>
+                  <a:pt x="1272010" y="180511"/>
+                </a:lnTo>
+                <a:lnTo>
+                  <a:pt x="1094151" y="132854"/>
+                </a:lnTo>
+                <a:lnTo>
+                  <a:pt x="914517" y="92397"/>
+                </a:lnTo>
+                <a:lnTo>
+                  <a:pt x="733400" y="59206"/>
+                </a:lnTo>
+                <a:lnTo>
+                  <a:pt x="551093" y="33335"/>
+                </a:lnTo>
+                <a:lnTo>
+                  <a:pt x="367893" y="14825"/>
+                </a:lnTo>
+                <a:lnTo>
+                  <a:pt x="184095" y="3707"/>
+                </a:lnTo>
+                <a:lnTo>
+                  <a:pt x="0" y="0"/>
+                </a:lnTo>
+                <a:close/>
+              </a:path>
+            </a:pathLst>
+          </a:custGeom>
+          <a:solidFill>
+            <a:srgbClr val="1E4A5A"/>
+          </a:solidFill>
+          <a:ln w="17780">
+            <a:solidFill>
+              <a:srgbClr val="2B6678"/>
+            </a:solidFill>
+          </a:ln>
           <a:effectLst/>
         </p:spPr>
         <p:txBody>
-          <a:bodyPr wrap="none" lIns="18288" rIns="18288" tIns="18288" bIns="18288" anchor="t">
-            <a:spAutoFit/>
-          </a:bodyPr>
-          <a:lstStyle/>
-          <a:p>
-            <a:pPr algn="l">
-              <a:spcAft>
-                <a:spcPts val="0"/>
-              </a:spcAft>
-            </a:pPr>
-            <a:r>
-              <a:rPr sz="1400" b="1" i="0">
-                <a:solidFill>
-                  <a:srgbClr val="8EDBD4"/>
-                </a:solidFill>
-                <a:latin typeface="Arial"/>
-              </a:rPr>
-              <a:t>Size of each term in the integrated momentum equation (m/s, log scale)</a:t>
-            </a:r>
+          <a:bodyPr rtlCol="0" anchor="ctr"/>
+          <a:lstStyle/>
+          <a:p>
+            <a:pPr algn="ctr"/>
           </a:p>
         </p:txBody>
       </p:sp>
@@ -3183,17 +3307,18 @@
           <p:nvPr/>
         </p:nvCxnSpPr>
         <p:spPr>
-          <a:xfrm>
-            <a:off x="3108960" y="1554480"/>
-            <a:ext cx="0" cy="2423159"/>
+          <a:xfrm flipV="1">
+            <a:off x="1005840" y="4256454"/>
+            <a:ext cx="4348230" cy="1412826"/>
           </a:xfrm>
           <a:prstGeom prst="line">
             <a:avLst/>
           </a:prstGeom>
-          <a:ln w="10160">
+          <a:ln w="13970">
             <a:solidFill>
-              <a:srgbClr val="2E4756"/>
+              <a:srgbClr val="B4C7D2"/>
             </a:solidFill>
+            <a:prstDash val="dash"/>
           </a:ln>
           <a:effectLst/>
         </p:spPr>
@@ -3206,8 +3331,8 @@
         </p:nvSpPr>
         <p:spPr>
           <a:xfrm>
-            <a:off x="2697479" y="4023360"/>
-            <a:ext cx="822960" cy="216153"/>
+            <a:off x="5397552" y="4150886"/>
+            <a:ext cx="914400" cy="208407"/>
           </a:xfrm>
           <a:prstGeom prst="rect">
             <a:avLst/>
@@ -3221,19 +3346,19 @@
           </a:bodyPr>
           <a:lstStyle/>
           <a:p>
-            <a:pPr algn="ctr">
+            <a:pPr algn="l">
               <a:spcAft>
                 <a:spcPts val="0"/>
               </a:spcAft>
             </a:pPr>
             <a:r>
-              <a:rPr sz="1100" b="0" i="0">
+              <a:rPr sz="1050" b="0" i="0">
                 <a:solidFill>
                   <a:srgbClr val="B4C7D2"/>
                 </a:solidFill>
                 <a:latin typeface="Arial"/>
               </a:rPr>
-              <a:t>10⁻⁵</a:t>
+              <a:t>Π = 0.8 Π₀</a:t>
             </a:r>
           </a:p>
         </p:txBody>
@@ -3245,17 +3370,18 @@
           <p:nvPr/>
         </p:nvCxnSpPr>
         <p:spPr>
-          <a:xfrm>
-            <a:off x="3870960" y="1554480"/>
-            <a:ext cx="0" cy="2423159"/>
+          <a:xfrm flipV="1">
+            <a:off x="1005840" y="2981925"/>
+            <a:ext cx="3698825" cy="2687355"/>
           </a:xfrm>
           <a:prstGeom prst="line">
             <a:avLst/>
           </a:prstGeom>
-          <a:ln w="10160">
+          <a:ln w="13970">
             <a:solidFill>
-              <a:srgbClr val="2E4756"/>
+              <a:srgbClr val="B4C7D2"/>
             </a:solidFill>
+            <a:prstDash val="dash"/>
           </a:ln>
           <a:effectLst/>
         </p:spPr>
@@ -3268,8 +3394,8 @@
         </p:nvSpPr>
         <p:spPr>
           <a:xfrm>
-            <a:off x="3459480" y="4023360"/>
-            <a:ext cx="822960" cy="216153"/>
+            <a:off x="4741653" y="2863612"/>
+            <a:ext cx="914400" cy="208407"/>
           </a:xfrm>
           <a:prstGeom prst="rect">
             <a:avLst/>
@@ -3283,19 +3409,19 @@
           </a:bodyPr>
           <a:lstStyle/>
           <a:p>
-            <a:pPr algn="ctr">
+            <a:pPr algn="l">
               <a:spcAft>
                 <a:spcPts val="0"/>
               </a:spcAft>
             </a:pPr>
             <a:r>
-              <a:rPr sz="1100" b="0" i="0">
+              <a:rPr sz="1050" b="0" i="0">
                 <a:solidFill>
                   <a:srgbClr val="B4C7D2"/>
                 </a:solidFill>
                 <a:latin typeface="Arial"/>
               </a:rPr>
-              <a:t>10⁻⁴</a:t>
+              <a:t>Π = 0.6 Π₀</a:t>
             </a:r>
           </a:p>
         </p:txBody>
@@ -3307,17 +3433,18 @@
           <p:nvPr/>
         </p:nvCxnSpPr>
         <p:spPr>
-          <a:xfrm>
-            <a:off x="4632960" y="1554480"/>
-            <a:ext cx="0" cy="2423159"/>
+          <a:xfrm flipV="1">
+            <a:off x="1005840" y="1970454"/>
+            <a:ext cx="2687354" cy="3698826"/>
           </a:xfrm>
           <a:prstGeom prst="line">
             <a:avLst/>
           </a:prstGeom>
-          <a:ln w="10160">
+          <a:ln w="13970">
             <a:solidFill>
-              <a:srgbClr val="2E4756"/>
+              <a:srgbClr val="B4C7D2"/>
             </a:solidFill>
+            <a:prstDash val="dash"/>
           </a:ln>
           <a:effectLst/>
         </p:spPr>
@@ -3330,8 +3457,8 @@
         </p:nvSpPr>
         <p:spPr>
           <a:xfrm>
-            <a:off x="4221480" y="4023360"/>
-            <a:ext cx="822960" cy="216153"/>
+            <a:off x="3720067" y="1842026"/>
+            <a:ext cx="914400" cy="208407"/>
           </a:xfrm>
           <a:prstGeom prst="rect">
             <a:avLst/>
@@ -3345,19 +3472,19 @@
           </a:bodyPr>
           <a:lstStyle/>
           <a:p>
-            <a:pPr algn="ctr">
+            <a:pPr algn="l">
               <a:spcAft>
                 <a:spcPts val="0"/>
               </a:spcAft>
             </a:pPr>
             <a:r>
-              <a:rPr sz="1100" b="0" i="0">
+              <a:rPr sz="1050" b="0" i="0">
                 <a:solidFill>
                   <a:srgbClr val="B4C7D2"/>
                 </a:solidFill>
                 <a:latin typeface="Arial"/>
               </a:rPr>
-              <a:t>10⁻³</a:t>
+              <a:t>Π = 0.4 Π₀</a:t>
             </a:r>
           </a:p>
         </p:txBody>
@@ -3369,17 +3496,18 @@
           <p:nvPr/>
         </p:nvCxnSpPr>
         <p:spPr>
-          <a:xfrm>
-            <a:off x="5394960" y="1554480"/>
-            <a:ext cx="0" cy="2423159"/>
+          <a:xfrm flipV="1">
+            <a:off x="1005840" y="1321049"/>
+            <a:ext cx="1412825" cy="4348231"/>
           </a:xfrm>
           <a:prstGeom prst="line">
             <a:avLst/>
           </a:prstGeom>
-          <a:ln w="10160">
+          <a:ln w="13970">
             <a:solidFill>
-              <a:srgbClr val="2E4756"/>
+              <a:srgbClr val="B4C7D2"/>
             </a:solidFill>
+            <a:prstDash val="dash"/>
           </a:ln>
           <a:effectLst/>
         </p:spPr>
@@ -3392,8 +3520,8 @@
         </p:nvSpPr>
         <p:spPr>
           <a:xfrm>
-            <a:off x="4983480" y="4023360"/>
-            <a:ext cx="822960" cy="216153"/>
+            <a:off x="2432793" y="1186127"/>
+            <a:ext cx="914400" cy="208407"/>
           </a:xfrm>
           <a:prstGeom prst="rect">
             <a:avLst/>
@@ -3407,19 +3535,19 @@
           </a:bodyPr>
           <a:lstStyle/>
           <a:p>
-            <a:pPr algn="ctr">
+            <a:pPr algn="l">
               <a:spcAft>
                 <a:spcPts val="0"/>
               </a:spcAft>
             </a:pPr>
             <a:r>
-              <a:rPr sz="1100" b="0" i="0">
+              <a:rPr sz="1050" b="0" i="0">
                 <a:solidFill>
                   <a:srgbClr val="B4C7D2"/>
                 </a:solidFill>
                 <a:latin typeface="Arial"/>
               </a:rPr>
-              <a:t>10⁻²</a:t>
+              <a:t>Π = 0.2 Π₀</a:t>
             </a:r>
           </a:p>
         </p:txBody>
@@ -3432,15 +3560,15 @@
         </p:nvCxnSpPr>
         <p:spPr>
           <a:xfrm>
-            <a:off x="6156959" y="1554480"/>
-            <a:ext cx="0" cy="2423159"/>
+            <a:off x="1005840" y="5669280"/>
+            <a:ext cx="4572000" cy="0"/>
           </a:xfrm>
           <a:prstGeom prst="line">
             <a:avLst/>
           </a:prstGeom>
-          <a:ln w="10160">
+          <a:ln w="50800">
             <a:solidFill>
-              <a:srgbClr val="2E4756"/>
+              <a:srgbClr val="F2B880"/>
             </a:solidFill>
           </a:ln>
           <a:effectLst/>
@@ -3454,8 +3582,8 @@
         </p:nvSpPr>
         <p:spPr>
           <a:xfrm>
-            <a:off x="5745479" y="4023360"/>
-            <a:ext cx="822960" cy="216153"/>
+            <a:off x="1920240" y="5742432"/>
+            <a:ext cx="2926080" cy="239395"/>
           </a:xfrm>
           <a:prstGeom prst="rect">
             <a:avLst/>
@@ -3469,19 +3597,19 @@
           </a:bodyPr>
           <a:lstStyle/>
           <a:p>
-            <a:pPr algn="ctr">
+            <a:pPr algn="l">
               <a:spcAft>
                 <a:spcPts val="0"/>
               </a:spcAft>
             </a:pPr>
             <a:r>
-              <a:rPr sz="1100" b="0" i="0">
+              <a:rPr sz="1250" b="1" i="0">
                 <a:solidFill>
-                  <a:srgbClr val="B4C7D2"/>
+                  <a:srgbClr val="F2B880"/>
                 </a:solidFill>
                 <a:latin typeface="Arial"/>
               </a:rPr>
-              <a:t>10⁻¹</a:t>
+              <a:t>driven boundary: Π = Π₀</a:t>
             </a:r>
           </a:p>
         </p:txBody>
@@ -3493,16 +3621,16 @@
           <p:nvPr/>
         </p:nvCxnSpPr>
         <p:spPr>
-          <a:xfrm>
-            <a:off x="6918960" y="1554480"/>
-            <a:ext cx="0" cy="2423159"/>
+          <a:xfrm flipV="1">
+            <a:off x="1005840" y="1097280"/>
+            <a:ext cx="0" cy="4572000"/>
           </a:xfrm>
           <a:prstGeom prst="line">
             <a:avLst/>
           </a:prstGeom>
-          <a:ln w="10160">
+          <a:ln w="50800">
             <a:solidFill>
-              <a:srgbClr val="2E4756"/>
+              <a:srgbClr val="8EDBD4"/>
             </a:solidFill>
           </a:ln>
           <a:effectLst/>
@@ -3516,8 +3644,8 @@
         </p:nvSpPr>
         <p:spPr>
           <a:xfrm>
-            <a:off x="6507480" y="4023360"/>
-            <a:ext cx="822960" cy="216153"/>
+            <a:off x="1097280" y="777240"/>
+            <a:ext cx="3108960" cy="239395"/>
           </a:xfrm>
           <a:prstGeom prst="rect">
             <a:avLst/>
@@ -3531,55 +3659,405 @@
           </a:bodyPr>
           <a:lstStyle/>
           <a:p>
-            <a:pPr algn="ctr">
+            <a:pPr algn="l">
               <a:spcAft>
                 <a:spcPts val="0"/>
               </a:spcAft>
             </a:pPr>
             <a:r>
-              <a:rPr sz="1100" b="0" i="0">
+              <a:rPr sz="1250" b="1" i="0">
                 <a:solidFill>
-                  <a:srgbClr val="B4C7D2"/>
+                  <a:srgbClr val="8EDBD4"/>
                 </a:solidFill>
                 <a:latin typeface="Arial"/>
               </a:rPr>
-              <a:t>10⁰</a:t>
-            </a:r>
+              <a:t>free boundary: Π = 0</a:t>
+            </a:r>
+          </a:p>
+        </p:txBody>
+      </p:sp>
+      <p:sp>
+        <p:nvSpPr>
+          <p:cNvPr id="16" name="C1-E22 polygon 14" descr="sci-ppt:o014"/>
+          <p:cNvSpPr/>
+          <p:nvPr/>
+        </p:nvSpPr>
+        <p:spPr>
+          <a:xfrm>
+            <a:off x="1169815" y="4584321"/>
+            <a:ext cx="920983" cy="920983"/>
+          </a:xfrm>
+          <a:custGeom>
+            <a:avLst/>
+            <a:gdLst/>
+            <a:ahLst/>
+            <a:cxnLst/>
+            <a:rect l="l" t="t" r="r" b="b"/>
+            <a:pathLst>
+              <a:path w="920983" h="920983">
+                <a:moveTo>
+                  <a:pt x="920983" y="920983"/>
+                </a:moveTo>
+                <a:lnTo>
+                  <a:pt x="907598" y="848837"/>
+                </a:lnTo>
+                <a:lnTo>
+                  <a:pt x="889421" y="777748"/>
+                </a:lnTo>
+                <a:lnTo>
+                  <a:pt x="866534" y="708032"/>
+                </a:lnTo>
+                <a:lnTo>
+                  <a:pt x="839038" y="640001"/>
+                </a:lnTo>
+                <a:lnTo>
+                  <a:pt x="807057" y="573960"/>
+                </a:lnTo>
+                <a:lnTo>
+                  <a:pt x="770734" y="510205"/>
+                </a:lnTo>
+                <a:lnTo>
+                  <a:pt x="730231" y="449019"/>
+                </a:lnTo>
+                <a:lnTo>
+                  <a:pt x="685729" y="390678"/>
+                </a:lnTo>
+                <a:lnTo>
+                  <a:pt x="637427" y="335441"/>
+                </a:lnTo>
+                <a:lnTo>
+                  <a:pt x="585542" y="283556"/>
+                </a:lnTo>
+                <a:lnTo>
+                  <a:pt x="530305" y="235254"/>
+                </a:lnTo>
+                <a:lnTo>
+                  <a:pt x="471964" y="190752"/>
+                </a:lnTo>
+                <a:lnTo>
+                  <a:pt x="410778" y="150249"/>
+                </a:lnTo>
+                <a:lnTo>
+                  <a:pt x="347023" y="113926"/>
+                </a:lnTo>
+                <a:lnTo>
+                  <a:pt x="280982" y="81945"/>
+                </a:lnTo>
+                <a:lnTo>
+                  <a:pt x="212951" y="54449"/>
+                </a:lnTo>
+                <a:lnTo>
+                  <a:pt x="143235" y="31562"/>
+                </a:lnTo>
+                <a:lnTo>
+                  <a:pt x="72146" y="13385"/>
+                </a:lnTo>
+                <a:lnTo>
+                  <a:pt x="0" y="0"/>
+                </a:lnTo>
+              </a:path>
+            </a:pathLst>
+          </a:custGeom>
+          <a:noFill/>
+          <a:ln w="15240">
+            <a:solidFill>
+              <a:srgbClr val="F2B880">
+                <a:alpha val="70000"/>
+              </a:srgbClr>
+            </a:solidFill>
+          </a:ln>
+          <a:effectLst/>
+        </p:spPr>
+        <p:txBody>
+          <a:bodyPr rtlCol="0" anchor="ctr"/>
+          <a:lstStyle/>
+          <a:p>
+            <a:pPr algn="ctr"/>
           </a:p>
         </p:txBody>
       </p:sp>
       <p:cxnSp>
         <p:nvCxnSpPr>
-          <p:cNvPr id="16" name="C1-E22 line 14" descr="sci-ppt:o014"/>
+          <p:cNvPr id="17" name="C1-E22 arrow 15" descr="sci-ppt:o015"/>
           <p:cNvCxnSpPr/>
           <p:nvPr/>
         </p:nvCxnSpPr>
         <p:spPr>
-          <a:xfrm>
-            <a:off x="7680960" y="1554480"/>
-            <a:ext cx="0" cy="2423159"/>
+          <a:xfrm flipH="1" flipV="1">
+            <a:off x="1240263" y="4443583"/>
+            <a:ext cx="460134" cy="376218"/>
           </a:xfrm>
           <a:prstGeom prst="line">
             <a:avLst/>
           </a:prstGeom>
-          <a:ln w="10160">
+          <a:ln w="38100">
             <a:solidFill>
-              <a:srgbClr val="2E4756"/>
+              <a:srgbClr val="F2B880"/>
+            </a:solidFill>
+            <a:headEnd type="none" w="med" len="med"/>
+            <a:tailEnd type="triangle" w="med" len="med"/>
+          </a:ln>
+          <a:effectLst/>
+        </p:spPr>
+      </p:cxnSp>
+      <p:sp>
+        <p:nvSpPr>
+          <p:cNvPr id="18" name="C1-E22 polygon 16" descr="sci-ppt:o016"/>
+          <p:cNvSpPr/>
+          <p:nvPr/>
+        </p:nvSpPr>
+        <p:spPr>
+          <a:xfrm>
+            <a:off x="1333790" y="3499362"/>
+            <a:ext cx="1841967" cy="1841967"/>
+          </a:xfrm>
+          <a:custGeom>
+            <a:avLst/>
+            <a:gdLst/>
+            <a:ahLst/>
+            <a:cxnLst/>
+            <a:rect l="l" t="t" r="r" b="b"/>
+            <a:pathLst>
+              <a:path w="1841967" h="1841967">
+                <a:moveTo>
+                  <a:pt x="1841967" y="1841967"/>
+                </a:moveTo>
+                <a:lnTo>
+                  <a:pt x="1815197" y="1697675"/>
+                </a:lnTo>
+                <a:lnTo>
+                  <a:pt x="1778843" y="1555496"/>
+                </a:lnTo>
+                <a:lnTo>
+                  <a:pt x="1733068" y="1416064"/>
+                </a:lnTo>
+                <a:lnTo>
+                  <a:pt x="1678077" y="1280003"/>
+                </a:lnTo>
+                <a:lnTo>
+                  <a:pt x="1614115" y="1147921"/>
+                </a:lnTo>
+                <a:lnTo>
+                  <a:pt x="1541468" y="1020410"/>
+                </a:lnTo>
+                <a:lnTo>
+                  <a:pt x="1460462" y="898039"/>
+                </a:lnTo>
+                <a:lnTo>
+                  <a:pt x="1371458" y="781356"/>
+                </a:lnTo>
+                <a:lnTo>
+                  <a:pt x="1274855" y="670882"/>
+                </a:lnTo>
+                <a:lnTo>
+                  <a:pt x="1171085" y="567112"/>
+                </a:lnTo>
+                <a:lnTo>
+                  <a:pt x="1060611" y="470509"/>
+                </a:lnTo>
+                <a:lnTo>
+                  <a:pt x="943928" y="381505"/>
+                </a:lnTo>
+                <a:lnTo>
+                  <a:pt x="821557" y="300499"/>
+                </a:lnTo>
+                <a:lnTo>
+                  <a:pt x="694046" y="227852"/>
+                </a:lnTo>
+                <a:lnTo>
+                  <a:pt x="561964" y="163890"/>
+                </a:lnTo>
+                <a:lnTo>
+                  <a:pt x="425903" y="108899"/>
+                </a:lnTo>
+                <a:lnTo>
+                  <a:pt x="286471" y="63124"/>
+                </a:lnTo>
+                <a:lnTo>
+                  <a:pt x="144292" y="26770"/>
+                </a:lnTo>
+                <a:lnTo>
+                  <a:pt x="0" y="0"/>
+                </a:lnTo>
+              </a:path>
+            </a:pathLst>
+          </a:custGeom>
+          <a:noFill/>
+          <a:ln w="15240">
+            <a:solidFill>
+              <a:srgbClr val="F2B880">
+                <a:alpha val="70000"/>
+              </a:srgbClr>
             </a:solidFill>
           </a:ln>
           <a:effectLst/>
         </p:spPr>
+        <p:txBody>
+          <a:bodyPr rtlCol="0" anchor="ctr"/>
+          <a:lstStyle/>
+          <a:p>
+            <a:pPr algn="ctr"/>
+          </a:p>
+        </p:txBody>
+      </p:sp>
+      <p:cxnSp>
+        <p:nvCxnSpPr>
+          <p:cNvPr id="19" name="C1-E22 arrow 17" descr="sci-ppt:o017"/>
+          <p:cNvCxnSpPr/>
+          <p:nvPr/>
+        </p:nvCxnSpPr>
+        <p:spPr>
+          <a:xfrm flipH="1" flipV="1">
+            <a:off x="2164888" y="3782214"/>
+            <a:ext cx="230067" cy="188109"/>
+          </a:xfrm>
+          <a:prstGeom prst="line">
+            <a:avLst/>
+          </a:prstGeom>
+          <a:ln w="38100">
+            <a:solidFill>
+              <a:srgbClr val="F2B880"/>
+            </a:solidFill>
+            <a:headEnd type="none" w="med" len="med"/>
+            <a:tailEnd type="triangle" w="med" len="med"/>
+          </a:ln>
+          <a:effectLst/>
+        </p:spPr>
       </p:cxnSp>
       <p:sp>
         <p:nvSpPr>
-          <p:cNvPr id="17" name="C1-E22 text 15" descr="sci-ppt:o015"/>
+          <p:cNvPr id="20" name="C1-E22 polygon 18" descr="sci-ppt:o018"/>
+          <p:cNvSpPr/>
+          <p:nvPr/>
+        </p:nvSpPr>
+        <p:spPr>
+          <a:xfrm>
+            <a:off x="1497766" y="2414403"/>
+            <a:ext cx="2762950" cy="2762950"/>
+          </a:xfrm>
+          <a:custGeom>
+            <a:avLst/>
+            <a:gdLst/>
+            <a:ahLst/>
+            <a:cxnLst/>
+            <a:rect l="l" t="t" r="r" b="b"/>
+            <a:pathLst>
+              <a:path w="2762950" h="2762950">
+                <a:moveTo>
+                  <a:pt x="2762950" y="2762950"/>
+                </a:moveTo>
+                <a:lnTo>
+                  <a:pt x="2722795" y="2546513"/>
+                </a:lnTo>
+                <a:lnTo>
+                  <a:pt x="2668264" y="2333244"/>
+                </a:lnTo>
+                <a:lnTo>
+                  <a:pt x="2599602" y="2124096"/>
+                </a:lnTo>
+                <a:lnTo>
+                  <a:pt x="2517114" y="1920004"/>
+                </a:lnTo>
+                <a:lnTo>
+                  <a:pt x="2421171" y="1721882"/>
+                </a:lnTo>
+                <a:lnTo>
+                  <a:pt x="2312202" y="1530615"/>
+                </a:lnTo>
+                <a:lnTo>
+                  <a:pt x="2190692" y="1347059"/>
+                </a:lnTo>
+                <a:lnTo>
+                  <a:pt x="2057187" y="1172034"/>
+                </a:lnTo>
+                <a:lnTo>
+                  <a:pt x="1912282" y="1006323"/>
+                </a:lnTo>
+                <a:lnTo>
+                  <a:pt x="1756627" y="850668"/>
+                </a:lnTo>
+                <a:lnTo>
+                  <a:pt x="1590916" y="705763"/>
+                </a:lnTo>
+                <a:lnTo>
+                  <a:pt x="1415891" y="572258"/>
+                </a:lnTo>
+                <a:lnTo>
+                  <a:pt x="1232335" y="450748"/>
+                </a:lnTo>
+                <a:lnTo>
+                  <a:pt x="1041068" y="341779"/>
+                </a:lnTo>
+                <a:lnTo>
+                  <a:pt x="842946" y="245836"/>
+                </a:lnTo>
+                <a:lnTo>
+                  <a:pt x="638854" y="163348"/>
+                </a:lnTo>
+                <a:lnTo>
+                  <a:pt x="429706" y="94686"/>
+                </a:lnTo>
+                <a:lnTo>
+                  <a:pt x="216437" y="40155"/>
+                </a:lnTo>
+                <a:lnTo>
+                  <a:pt x="0" y="0"/>
+                </a:lnTo>
+              </a:path>
+            </a:pathLst>
+          </a:custGeom>
+          <a:noFill/>
+          <a:ln w="15240">
+            <a:solidFill>
+              <a:srgbClr val="F2B880">
+                <a:alpha val="70000"/>
+              </a:srgbClr>
+            </a:solidFill>
+          </a:ln>
+          <a:effectLst/>
+        </p:spPr>
+        <p:txBody>
+          <a:bodyPr rtlCol="0" anchor="ctr"/>
+          <a:lstStyle/>
+          <a:p>
+            <a:pPr algn="ctr"/>
+          </a:p>
+        </p:txBody>
+      </p:sp>
+      <p:cxnSp>
+        <p:nvCxnSpPr>
+          <p:cNvPr id="21" name="C1-E22 arrow 19" descr="sci-ppt:o019"/>
+          <p:cNvCxnSpPr/>
+          <p:nvPr/>
+        </p:nvCxnSpPr>
+        <p:spPr>
+          <a:xfrm flipH="1" flipV="1">
+            <a:off x="2936135" y="2995439"/>
+            <a:ext cx="153378" cy="125406"/>
+          </a:xfrm>
+          <a:prstGeom prst="line">
+            <a:avLst/>
+          </a:prstGeom>
+          <a:ln w="38100">
+            <a:solidFill>
+              <a:srgbClr val="F2B880"/>
+            </a:solidFill>
+            <a:headEnd type="none" w="med" len="med"/>
+            <a:tailEnd type="triangle" w="med" len="med"/>
+          </a:ln>
+          <a:effectLst/>
+        </p:spPr>
+      </p:cxnSp>
+      <p:sp>
+        <p:nvSpPr>
+          <p:cNvPr id="22" name="C1-E22 text 20" descr="sci-ppt:o020"/>
           <p:cNvSpPr txBox="1"/>
           <p:nvPr/>
         </p:nvSpPr>
         <p:spPr>
           <a:xfrm>
-            <a:off x="7269480" y="4023360"/>
-            <a:ext cx="822960" cy="216153"/>
+            <a:off x="6858000" y="1005840"/>
+            <a:ext cx="4937760" cy="278130"/>
           </a:xfrm>
           <a:prstGeom prst="rect">
             <a:avLst/>
@@ -3593,33 +4071,33 @@
           </a:bodyPr>
           <a:lstStyle/>
           <a:p>
-            <a:pPr algn="ctr">
+            <a:pPr algn="l">
               <a:spcAft>
                 <a:spcPts val="0"/>
               </a:spcAft>
             </a:pPr>
             <a:r>
-              <a:rPr sz="1100" b="0" i="0">
+              <a:rPr sz="1500" b="1" i="0">
                 <a:solidFill>
-                  <a:srgbClr val="B4C7D2"/>
+                  <a:srgbClr val="8EDBD4"/>
                 </a:solidFill>
                 <a:latin typeface="Arial"/>
               </a:rPr>
-              <a:t>10¹</a:t>
-            </a:r>
-          </a:p>
-        </p:txBody>
-      </p:sp>
-      <p:sp>
-        <p:nvSpPr>
-          <p:cNvPr id="18" name="C1-E22 text 16" descr="sci-ppt:o016"/>
+              <a:t>Reduced model: ∇²Π = 0</a:t>
+            </a:r>
+          </a:p>
+        </p:txBody>
+      </p:sp>
+      <p:sp>
+        <p:nvSpPr>
+          <p:cNvPr id="23" name="C1-E22 text 21" descr="sci-ppt:o021"/>
           <p:cNvSpPr txBox="1"/>
           <p:nvPr/>
         </p:nvSpPr>
         <p:spPr>
           <a:xfrm>
-            <a:off x="457200" y="1673352"/>
-            <a:ext cx="2560320" cy="417576"/>
+            <a:off x="7059168" y="1508760"/>
+            <a:ext cx="4736592" cy="433070"/>
           </a:xfrm>
           <a:prstGeom prst="rect">
             <a:avLst/>
@@ -3639,13 +4117,13 @@
               </a:spcAft>
             </a:pPr>
             <a:r>
-              <a:rPr sz="1200" b="0" i="0">
+              <a:rPr sz="1250" b="0" i="0">
                 <a:solidFill>
                   <a:srgbClr val="E7F0F3"/>
                 </a:solidFill>
                 <a:latin typeface="Arial"/>
               </a:rPr>
-              <a:t>pressure-impulse term</a:t>
+              <a:t>Incompressible short event: ∇·Δu = 0 and Δu ≃ −∇Π/ρ give</a:t>
             </a:r>
           </a:p>
           <a:p>
@@ -3655,534 +4133,26 @@
               </a:spcAft>
             </a:pPr>
             <a:r>
-              <a:rPr sz="1200" b="0" i="0">
+              <a:rPr sz="1250" b="0" i="0">
                 <a:solidFill>
                   <a:srgbClr val="E7F0F3"/>
                 </a:solidFill>
                 <a:latin typeface="Arial"/>
               </a:rPr>
-              <a:t>Π / (ρL) = Δu</a:t>
-            </a:r>
-          </a:p>
-        </p:txBody>
-      </p:sp>
-      <p:sp>
-        <p:nvSpPr>
-          <p:cNvPr id="19" name="C1-E22 rect 17" descr="sci-ppt:o017"/>
+              <a:t>Laplace's equation for Π.</a:t>
+            </a:r>
+          </a:p>
+        </p:txBody>
+      </p:sp>
+      <p:sp>
+        <p:nvSpPr>
+          <p:cNvPr id="24" name="C1-E22 ellipse 22" descr="sci-ppt:o022"/>
           <p:cNvSpPr/>
           <p:nvPr/>
         </p:nvSpPr>
         <p:spPr>
           <a:xfrm>
-            <a:off x="3108960" y="1737360"/>
-            <a:ext cx="4173566" cy="411480"/>
-          </a:xfrm>
-          <a:prstGeom prst="rect">
-            <a:avLst/>
-          </a:prstGeom>
-          <a:solidFill>
-            <a:srgbClr val="8EDBD4">
-              <a:alpha val="85000"/>
-            </a:srgbClr>
-          </a:solidFill>
-          <a:ln w="12700">
-            <a:solidFill>
-              <a:srgbClr val="8EDBD4">
-                <a:alpha val="85000"/>
-              </a:srgbClr>
-            </a:solidFill>
-          </a:ln>
-          <a:effectLst/>
-        </p:spPr>
-        <p:txBody>
-          <a:bodyPr rtlCol="0" anchor="ctr"/>
-          <a:lstStyle/>
-          <a:p>
-            <a:pPr algn="ctr"/>
-          </a:p>
-        </p:txBody>
-      </p:sp>
-      <p:sp>
-        <p:nvSpPr>
-          <p:cNvPr id="20" name="C1-E22 text 18" descr="sci-ppt:o018"/>
-          <p:cNvSpPr txBox="1"/>
-          <p:nvPr/>
-        </p:nvSpPr>
-        <p:spPr>
-          <a:xfrm>
-            <a:off x="7355678" y="1783080"/>
-            <a:ext cx="2011680" cy="239395"/>
-          </a:xfrm>
-          <a:prstGeom prst="rect">
-            <a:avLst/>
-          </a:prstGeom>
-          <a:noFill/>
-          <a:effectLst/>
-        </p:spPr>
-        <p:txBody>
-          <a:bodyPr wrap="none" lIns="18288" rIns="18288" tIns="18288" bIns="18288" anchor="t">
-            <a:spAutoFit/>
-          </a:bodyPr>
-          <a:lstStyle/>
-          <a:p>
-            <a:pPr algn="l">
-              <a:spcAft>
-                <a:spcPts val="0"/>
-              </a:spcAft>
-            </a:pPr>
-            <a:r>
-              <a:rPr sz="1250" b="1" i="0">
-                <a:solidFill>
-                  <a:srgbClr val="E7F0F3"/>
-                </a:solidFill>
-                <a:latin typeface="Arial"/>
-              </a:rPr>
-              <a:t>3 m/s</a:t>
-            </a:r>
-          </a:p>
-        </p:txBody>
-      </p:sp>
-      <p:sp>
-        <p:nvSpPr>
-          <p:cNvPr id="21" name="C1-E22 text 19" descr="sci-ppt:o019"/>
-          <p:cNvSpPr txBox="1"/>
-          <p:nvPr/>
-        </p:nvSpPr>
-        <p:spPr>
-          <a:xfrm>
-            <a:off x="457200" y="2450592"/>
-            <a:ext cx="2560320" cy="417576"/>
-          </a:xfrm>
-          <a:prstGeom prst="rect">
-            <a:avLst/>
-          </a:prstGeom>
-          <a:noFill/>
-          <a:effectLst/>
-        </p:spPr>
-        <p:txBody>
-          <a:bodyPr wrap="none" lIns="18288" rIns="18288" tIns="18288" bIns="18288" anchor="t">
-            <a:spAutoFit/>
-          </a:bodyPr>
-          <a:lstStyle/>
-          <a:p>
-            <a:pPr algn="l">
-              <a:spcAft>
-                <a:spcPts val="0"/>
-              </a:spcAft>
-            </a:pPr>
-            <a:r>
-              <a:rPr sz="1200" b="0" i="0">
-                <a:solidFill>
-                  <a:srgbClr val="E7F0F3"/>
-                </a:solidFill>
-                <a:latin typeface="Arial"/>
-              </a:rPr>
-              <a:t>convective impulse</a:t>
-            </a:r>
-          </a:p>
-          <a:p>
-            <a:pPr algn="l">
-              <a:spcAft>
-                <a:spcPts val="0"/>
-              </a:spcAft>
-            </a:pPr>
-            <a:r>
-              <a:rPr sz="1200" b="0" i="0">
-                <a:solidFill>
-                  <a:srgbClr val="E7F0F3"/>
-                </a:solidFill>
-                <a:latin typeface="Arial"/>
-              </a:rPr>
-              <a:t>~ U²τ/L</a:t>
-            </a:r>
-          </a:p>
-        </p:txBody>
-      </p:sp>
-      <p:sp>
-        <p:nvSpPr>
-          <p:cNvPr id="22" name="C1-E22 rect 20" descr="sci-ppt:o020"/>
-          <p:cNvSpPr/>
-          <p:nvPr/>
-        </p:nvSpPr>
-        <p:spPr>
-          <a:xfrm>
-            <a:off x="3108960" y="2514600"/>
-            <a:ext cx="2783747" cy="411480"/>
-          </a:xfrm>
-          <a:prstGeom prst="rect">
-            <a:avLst/>
-          </a:prstGeom>
-          <a:solidFill>
-            <a:srgbClr val="F2B880">
-              <a:alpha val="85000"/>
-            </a:srgbClr>
-          </a:solidFill>
-          <a:ln w="12700">
-            <a:solidFill>
-              <a:srgbClr val="F2B880">
-                <a:alpha val="85000"/>
-              </a:srgbClr>
-            </a:solidFill>
-          </a:ln>
-          <a:effectLst/>
-        </p:spPr>
-        <p:txBody>
-          <a:bodyPr rtlCol="0" anchor="ctr"/>
-          <a:lstStyle/>
-          <a:p>
-            <a:pPr algn="ctr"/>
-          </a:p>
-        </p:txBody>
-      </p:sp>
-      <p:sp>
-        <p:nvSpPr>
-          <p:cNvPr id="23" name="C1-E22 text 21" descr="sci-ppt:o021"/>
-          <p:cNvSpPr txBox="1"/>
-          <p:nvPr/>
-        </p:nvSpPr>
-        <p:spPr>
-          <a:xfrm>
-            <a:off x="5965859" y="2560320"/>
-            <a:ext cx="2011680" cy="239395"/>
-          </a:xfrm>
-          <a:prstGeom prst="rect">
-            <a:avLst/>
-          </a:prstGeom>
-          <a:noFill/>
-          <a:effectLst/>
-        </p:spPr>
-        <p:txBody>
-          <a:bodyPr wrap="none" lIns="18288" rIns="18288" tIns="18288" bIns="18288" anchor="t">
-            <a:spAutoFit/>
-          </a:bodyPr>
-          <a:lstStyle/>
-          <a:p>
-            <a:pPr algn="l">
-              <a:spcAft>
-                <a:spcPts val="0"/>
-              </a:spcAft>
-            </a:pPr>
-            <a:r>
-              <a:rPr sz="1250" b="1" i="0">
-                <a:solidFill>
-                  <a:srgbClr val="E7F0F3"/>
-                </a:solidFill>
-                <a:latin typeface="Arial"/>
-              </a:rPr>
-              <a:t>0.045 m/s</a:t>
-            </a:r>
-          </a:p>
-        </p:txBody>
-      </p:sp>
-      <p:sp>
-        <p:nvSpPr>
-          <p:cNvPr id="24" name="C1-E22 text 22" descr="sci-ppt:o022"/>
-          <p:cNvSpPr txBox="1"/>
-          <p:nvPr/>
-        </p:nvSpPr>
-        <p:spPr>
-          <a:xfrm>
-            <a:off x="457200" y="3227832"/>
-            <a:ext cx="2560320" cy="417576"/>
-          </a:xfrm>
-          <a:prstGeom prst="rect">
-            <a:avLst/>
-          </a:prstGeom>
-          <a:noFill/>
-          <a:effectLst/>
-        </p:spPr>
-        <p:txBody>
-          <a:bodyPr wrap="none" lIns="18288" rIns="18288" tIns="18288" bIns="18288" anchor="t">
-            <a:spAutoFit/>
-          </a:bodyPr>
-          <a:lstStyle/>
-          <a:p>
-            <a:pPr algn="l">
-              <a:spcAft>
-                <a:spcPts val="0"/>
-              </a:spcAft>
-            </a:pPr>
-            <a:r>
-              <a:rPr sz="1200" b="0" i="0">
-                <a:solidFill>
-                  <a:srgbClr val="E7F0F3"/>
-                </a:solidFill>
-                <a:latin typeface="Arial"/>
-              </a:rPr>
-              <a:t>viscous impulse</a:t>
-            </a:r>
-          </a:p>
-          <a:p>
-            <a:pPr algn="l">
-              <a:spcAft>
-                <a:spcPts val="0"/>
-              </a:spcAft>
-            </a:pPr>
-            <a:r>
-              <a:rPr sz="1200" b="0" i="0">
-                <a:solidFill>
-                  <a:srgbClr val="E7F0F3"/>
-                </a:solidFill>
-                <a:latin typeface="Arial"/>
-              </a:rPr>
-              <a:t>~ ν Δu τ/L²</a:t>
-            </a:r>
-          </a:p>
-        </p:txBody>
-      </p:sp>
-      <p:sp>
-        <p:nvSpPr>
-          <p:cNvPr id="25" name="C1-E22 rect 23" descr="sci-ppt:o023"/>
-          <p:cNvSpPr/>
-          <p:nvPr/>
-        </p:nvSpPr>
-        <p:spPr>
-          <a:xfrm>
-            <a:off x="3108960" y="3291839"/>
-            <a:ext cx="896181" cy="411480"/>
-          </a:xfrm>
-          <a:prstGeom prst="rect">
-            <a:avLst/>
-          </a:prstGeom>
-          <a:solidFill>
-            <a:srgbClr val="7FC8F8">
-              <a:alpha val="85000"/>
-            </a:srgbClr>
-          </a:solidFill>
-          <a:ln w="12700">
-            <a:solidFill>
-              <a:srgbClr val="7FC8F8">
-                <a:alpha val="85000"/>
-              </a:srgbClr>
-            </a:solidFill>
-          </a:ln>
-          <a:effectLst/>
-        </p:spPr>
-        <p:txBody>
-          <a:bodyPr rtlCol="0" anchor="ctr"/>
-          <a:lstStyle/>
-          <a:p>
-            <a:pPr algn="ctr"/>
-          </a:p>
-        </p:txBody>
-      </p:sp>
-      <p:sp>
-        <p:nvSpPr>
-          <p:cNvPr id="26" name="C1-E22 text 24" descr="sci-ppt:o024"/>
-          <p:cNvSpPr txBox="1"/>
-          <p:nvPr/>
-        </p:nvSpPr>
-        <p:spPr>
-          <a:xfrm>
-            <a:off x="4078293" y="3337560"/>
-            <a:ext cx="2011680" cy="239395"/>
-          </a:xfrm>
-          <a:prstGeom prst="rect">
-            <a:avLst/>
-          </a:prstGeom>
-          <a:noFill/>
-          <a:effectLst/>
-        </p:spPr>
-        <p:txBody>
-          <a:bodyPr wrap="none" lIns="18288" rIns="18288" tIns="18288" bIns="18288" anchor="t">
-            <a:spAutoFit/>
-          </a:bodyPr>
-          <a:lstStyle/>
-          <a:p>
-            <a:pPr algn="l">
-              <a:spcAft>
-                <a:spcPts val="0"/>
-              </a:spcAft>
-            </a:pPr>
-            <a:r>
-              <a:rPr sz="1250" b="1" i="0">
-                <a:solidFill>
-                  <a:srgbClr val="E7F0F3"/>
-                </a:solidFill>
-                <a:latin typeface="Arial"/>
-              </a:rPr>
-              <a:t>0.00015 m/s</a:t>
-            </a:r>
-          </a:p>
-        </p:txBody>
-      </p:sp>
-      <p:sp>
-        <p:nvSpPr>
-          <p:cNvPr id="27" name="C1-E22 round_rect 25" descr="sci-ppt:o025"/>
-          <p:cNvSpPr/>
-          <p:nvPr/>
-        </p:nvSpPr>
-        <p:spPr>
-          <a:xfrm>
-            <a:off x="8229600" y="1097280"/>
-            <a:ext cx="3611880" cy="3291840"/>
-          </a:xfrm>
-          <a:prstGeom prst="roundRect">
-            <a:avLst/>
-          </a:prstGeom>
-          <a:solidFill>
-            <a:srgbClr val="213E4B"/>
-          </a:solidFill>
-          <a:ln w="20320">
-            <a:solidFill>
-              <a:srgbClr val="8EDBD4"/>
-            </a:solidFill>
-          </a:ln>
-          <a:effectLst/>
-        </p:spPr>
-        <p:txBody>
-          <a:bodyPr rtlCol="0" anchor="ctr"/>
-          <a:lstStyle/>
-          <a:p>
-            <a:pPr algn="ctr"/>
-          </a:p>
-        </p:txBody>
-      </p:sp>
-      <p:sp>
-        <p:nvSpPr>
-          <p:cNvPr id="28" name="C1-E22 text 26" descr="sci-ppt:o026"/>
-          <p:cNvSpPr txBox="1"/>
-          <p:nvPr/>
-        </p:nvSpPr>
-        <p:spPr>
-          <a:xfrm>
-            <a:off x="8339327" y="1152144"/>
-            <a:ext cx="3392424" cy="247142"/>
-          </a:xfrm>
-          <a:prstGeom prst="rect">
-            <a:avLst/>
-          </a:prstGeom>
-          <a:noFill/>
-          <a:effectLst/>
-        </p:spPr>
-        <p:txBody>
-          <a:bodyPr wrap="none" lIns="18288" rIns="18288" tIns="18288" bIns="18288" anchor="t">
-            <a:spAutoFit/>
-          </a:bodyPr>
-          <a:lstStyle/>
-          <a:p>
-            <a:pPr algn="l">
-              <a:spcAft>
-                <a:spcPts val="0"/>
-              </a:spcAft>
-            </a:pPr>
-            <a:r>
-              <a:rPr sz="1300" b="1" i="0">
-                <a:solidFill>
-                  <a:srgbClr val="8EDBD4"/>
-                </a:solidFill>
-                <a:latin typeface="Arial"/>
-              </a:rPr>
-              <a:t>Why the short-event model works</a:t>
-            </a:r>
-          </a:p>
-        </p:txBody>
-      </p:sp>
-      <p:sp>
-        <p:nvSpPr>
-          <p:cNvPr id="29" name="C1-E22 text 27" descr="sci-ppt:o027"/>
-          <p:cNvSpPr txBox="1"/>
-          <p:nvPr/>
-        </p:nvSpPr>
-        <p:spPr>
-          <a:xfrm>
-            <a:off x="8366760" y="1554480"/>
-            <a:ext cx="3383280" cy="239395"/>
-          </a:xfrm>
-          <a:prstGeom prst="rect">
-            <a:avLst/>
-          </a:prstGeom>
-          <a:noFill/>
-          <a:effectLst/>
-        </p:spPr>
-        <p:txBody>
-          <a:bodyPr wrap="none" lIns="18288" rIns="18288" tIns="18288" bIns="18288" anchor="t">
-            <a:spAutoFit/>
-          </a:bodyPr>
-          <a:lstStyle/>
-          <a:p>
-            <a:pPr algn="l">
-              <a:spcAft>
-                <a:spcPts val="0"/>
-              </a:spcAft>
-            </a:pPr>
-            <a:r>
-              <a:rPr sz="1250" b="1" i="0">
-                <a:solidFill>
-                  <a:srgbClr val="E7F0F3"/>
-                </a:solidFill>
-                <a:latin typeface="Arial"/>
-              </a:rPr>
-              <a:t>Δu = −∇Π/ρ − ∫(u·∇)u dt + ν∫∇²u dt</a:t>
-            </a:r>
-          </a:p>
-        </p:txBody>
-      </p:sp>
-      <p:sp>
-        <p:nvSpPr>
-          <p:cNvPr id="30" name="C1-E22 text 28" descr="sci-ppt:o028"/>
-          <p:cNvSpPr txBox="1"/>
-          <p:nvPr/>
-        </p:nvSpPr>
-        <p:spPr>
-          <a:xfrm>
-            <a:off x="8567928" y="2286000"/>
-            <a:ext cx="3182112" cy="417576"/>
-          </a:xfrm>
-          <a:prstGeom prst="rect">
-            <a:avLst/>
-          </a:prstGeom>
-          <a:noFill/>
-          <a:effectLst/>
-        </p:spPr>
-        <p:txBody>
-          <a:bodyPr wrap="none" lIns="18288" rIns="18288" tIns="18288" bIns="18288" anchor="t">
-            <a:spAutoFit/>
-          </a:bodyPr>
-          <a:lstStyle/>
-          <a:p>
-            <a:pPr algn="l">
-              <a:spcAft>
-                <a:spcPts val="0"/>
-              </a:spcAft>
-            </a:pPr>
-            <a:r>
-              <a:rPr sz="1200" b="0" i="0">
-                <a:solidFill>
-                  <a:srgbClr val="E7F0F3"/>
-                </a:solidFill>
-                <a:latin typeface="Arial"/>
-              </a:rPr>
-              <a:t>Uτ/L = 0.015: convection moves the</a:t>
-            </a:r>
-          </a:p>
-          <a:p>
-            <a:pPr algn="l">
-              <a:spcAft>
-                <a:spcPts val="0"/>
-              </a:spcAft>
-            </a:pPr>
-            <a:r>
-              <a:rPr sz="1200" b="0" i="0">
-                <a:solidFill>
-                  <a:srgbClr val="E7F0F3"/>
-                </a:solidFill>
-                <a:latin typeface="Arial"/>
-              </a:rPr>
-              <a:t>fluid only 1.5 % of L.</a:t>
-            </a:r>
-          </a:p>
-        </p:txBody>
-      </p:sp>
-      <p:sp>
-        <p:nvSpPr>
-          <p:cNvPr id="31" name="C1-E22 ellipse 29" descr="sci-ppt:o029"/>
-          <p:cNvSpPr/>
-          <p:nvPr/>
-        </p:nvSpPr>
-        <p:spPr>
-          <a:xfrm>
-            <a:off x="8398764" y="2339340"/>
+            <a:off x="6890004" y="1566037"/>
             <a:ext cx="82296" cy="82296"/>
           </a:xfrm>
           <a:prstGeom prst="ellipse">
@@ -4208,14 +4178,14 @@
       </p:sp>
       <p:sp>
         <p:nvSpPr>
-          <p:cNvPr id="32" name="C1-E22 text 30" descr="sci-ppt:o030"/>
+          <p:cNvPr id="25" name="C1-E22 text 23" descr="sci-ppt:o023"/>
           <p:cNvSpPr txBox="1"/>
           <p:nvPr/>
         </p:nvSpPr>
         <p:spPr>
           <a:xfrm>
-            <a:off x="8567928" y="2749295"/>
-            <a:ext cx="3182112" cy="417576"/>
+            <a:off x="7059168" y="1987549"/>
+            <a:ext cx="4736592" cy="626745"/>
           </a:xfrm>
           <a:prstGeom prst="rect">
             <a:avLst/>
@@ -4235,13 +4205,13 @@
               </a:spcAft>
             </a:pPr>
             <a:r>
-              <a:rPr sz="1200" b="0" i="0">
+              <a:rPr sz="1250" b="0" i="0">
                 <a:solidFill>
                   <a:srgbClr val="E7F0F3"/>
                 </a:solidFill>
                 <a:latin typeface="Arial"/>
               </a:rPr>
-              <a:t>ντ/L² = 5×10⁻⁵: viscosity has no time</a:t>
+              <a:t>Π is fixed on the boundaries (Π₀ on the driven wall, 0</a:t>
             </a:r>
           </a:p>
           <a:p>
@@ -4251,26 +4221,42 @@
               </a:spcAft>
             </a:pPr>
             <a:r>
-              <a:rPr sz="1200" b="0" i="0">
+              <a:rPr sz="1250" b="0" i="0">
                 <a:solidFill>
                   <a:srgbClr val="E7F0F3"/>
                 </a:solidFill>
                 <a:latin typeface="Arial"/>
               </a:rPr>
-              <a:t>to act.</a:t>
-            </a:r>
-          </a:p>
-        </p:txBody>
-      </p:sp>
-      <p:sp>
-        <p:nvSpPr>
-          <p:cNvPr id="33" name="C1-E22 ellipse 31" descr="sci-ppt:o031"/>
+              <a:t>at the free surface); the interior follows from geometry</a:t>
+            </a:r>
+          </a:p>
+          <a:p>
+            <a:pPr algn="l">
+              <a:spcAft>
+                <a:spcPts val="0"/>
+              </a:spcAft>
+            </a:pPr>
+            <a:r>
+              <a:rPr sz="1250" b="0" i="0">
+                <a:solidFill>
+                  <a:srgbClr val="E7F0F3"/>
+                </a:solidFill>
+                <a:latin typeface="Arial"/>
+              </a:rPr>
+              <a:t>alone.</a:t>
+            </a:r>
+          </a:p>
+        </p:txBody>
+      </p:sp>
+      <p:sp>
+        <p:nvSpPr>
+          <p:cNvPr id="26" name="C1-E22 ellipse 24" descr="sci-ppt:o024"/>
           <p:cNvSpPr/>
           <p:nvPr/>
         </p:nvSpPr>
         <p:spPr>
           <a:xfrm>
-            <a:off x="8398764" y="2802636"/>
+            <a:off x="6890004" y="2044826"/>
             <a:ext cx="82296" cy="82296"/>
           </a:xfrm>
           <a:prstGeom prst="ellipse">
@@ -4296,14 +4282,14 @@
       </p:sp>
       <p:sp>
         <p:nvSpPr>
-          <p:cNvPr id="34" name="C1-E22 text 32" descr="sci-ppt:o032"/>
+          <p:cNvPr id="27" name="C1-E22 text 25" descr="sci-ppt:o025"/>
           <p:cNvSpPr txBox="1"/>
           <p:nvPr/>
         </p:nvSpPr>
         <p:spPr>
           <a:xfrm>
-            <a:off x="8567928" y="3212591"/>
-            <a:ext cx="3182112" cy="231648"/>
+            <a:off x="7059168" y="2660014"/>
+            <a:ext cx="4736592" cy="626745"/>
           </a:xfrm>
           <a:prstGeom prst="rect">
             <a:avLst/>
@@ -4323,26 +4309,58 @@
               </a:spcAft>
             </a:pPr>
             <a:r>
-              <a:rPr sz="1200" b="0" i="0">
+              <a:rPr sz="1250" b="0" i="0">
                 <a:solidFill>
                   <a:srgbClr val="E7F0F3"/>
                 </a:solidFill>
                 <a:latin typeface="Arial"/>
               </a:rPr>
-              <a:t>Dropping both leaves Δu ≃ −∇Π/ρ.</a:t>
-            </a:r>
-          </a:p>
-        </p:txBody>
-      </p:sp>
-      <p:sp>
-        <p:nvSpPr>
-          <p:cNvPr id="35" name="C1-E22 ellipse 33" descr="sci-ppt:o033"/>
+              <a:t>Here Π = Π₀(1 − θ/θ₀) in a right-angle corner is</a:t>
+            </a:r>
+          </a:p>
+          <a:p>
+            <a:pPr algn="l">
+              <a:spcAft>
+                <a:spcPts val="0"/>
+              </a:spcAft>
+            </a:pPr>
+            <a:r>
+              <a:rPr sz="1250" b="0" i="0">
+                <a:solidFill>
+                  <a:srgbClr val="E7F0F3"/>
+                </a:solidFill>
+                <a:latin typeface="Arial"/>
+              </a:rPr>
+              <a:t>harmonic, so Δu points along circular arcs toward the</a:t>
+            </a:r>
+          </a:p>
+          <a:p>
+            <a:pPr algn="l">
+              <a:spcAft>
+                <a:spcPts val="0"/>
+              </a:spcAft>
+            </a:pPr>
+            <a:r>
+              <a:rPr sz="1250" b="0" i="0">
+                <a:solidFill>
+                  <a:srgbClr val="E7F0F3"/>
+                </a:solidFill>
+                <a:latin typeface="Arial"/>
+              </a:rPr>
+              <a:t>free side.</a:t>
+            </a:r>
+          </a:p>
+        </p:txBody>
+      </p:sp>
+      <p:sp>
+        <p:nvSpPr>
+          <p:cNvPr id="28" name="C1-E22 ellipse 26" descr="sci-ppt:o026"/>
           <p:cNvSpPr/>
           <p:nvPr/>
         </p:nvSpPr>
         <p:spPr>
           <a:xfrm>
-            <a:off x="8398764" y="3265931"/>
+            <a:off x="6890004" y="2717291"/>
             <a:ext cx="82296" cy="82296"/>
           </a:xfrm>
           <a:prstGeom prst="ellipse">
@@ -4368,14 +4386,14 @@
       </p:sp>
       <p:sp>
         <p:nvSpPr>
-          <p:cNvPr id="36" name="C1-E22 text 34" descr="sci-ppt:o034"/>
+          <p:cNvPr id="29" name="C1-E22 text 27" descr="sci-ppt:o027"/>
           <p:cNvSpPr txBox="1"/>
           <p:nvPr/>
         </p:nvSpPr>
         <p:spPr>
           <a:xfrm>
-            <a:off x="457200" y="4434840"/>
-            <a:ext cx="11338560" cy="464057"/>
+            <a:off x="7059168" y="3332479"/>
+            <a:ext cx="4736592" cy="433070"/>
           </a:xfrm>
           <a:prstGeom prst="rect">
             <a:avLst/>
@@ -4395,13 +4413,13 @@
               </a:spcAft>
             </a:pPr>
             <a:r>
-              <a:rPr sz="1350" b="0" i="0">
+              <a:rPr sz="1250" b="0" i="0">
                 <a:solidFill>
                   <a:srgbClr val="E7F0F3"/>
                 </a:solidFill>
                 <a:latin typeface="Arial"/>
               </a:rPr>
-              <a:t>Bars start at 10⁻⁵ m/s. If either small ratio were near 1, the corresponding bar would be as long as the first and the</a:t>
+              <a:t>Arrow length ∝ 1/r: the impulse gradient is steepest</a:t>
             </a:r>
           </a:p>
           <a:p>
@@ -4411,27 +4429,91 @@
               </a:spcAft>
             </a:pPr>
             <a:r>
-              <a:rPr sz="1350" b="0" i="0">
+              <a:rPr sz="1250" b="0" i="0">
                 <a:solidFill>
                   <a:srgbClr val="E7F0F3"/>
                 </a:solidFill>
                 <a:latin typeface="Arial"/>
               </a:rPr>
-              <a:t>reduced model would fail.</a:t>
-            </a:r>
-          </a:p>
-        </p:txBody>
-      </p:sp>
-      <p:sp>
-        <p:nvSpPr>
-          <p:cNvPr id="37" name="C1-E22 text 35" descr="sci-ppt:o035"/>
+              <a:t>near the corner.</a:t>
+            </a:r>
+          </a:p>
+        </p:txBody>
+      </p:sp>
+      <p:sp>
+        <p:nvSpPr>
+          <p:cNvPr id="30" name="C1-E22 ellipse 28" descr="sci-ppt:o028"/>
+          <p:cNvSpPr/>
+          <p:nvPr/>
+        </p:nvSpPr>
+        <p:spPr>
+          <a:xfrm>
+            <a:off x="6890004" y="3389756"/>
+            <a:ext cx="82296" cy="82296"/>
+          </a:xfrm>
+          <a:prstGeom prst="ellipse">
+            <a:avLst/>
+          </a:prstGeom>
+          <a:solidFill>
+            <a:srgbClr val="8EDBD4"/>
+          </a:solidFill>
+          <a:ln w="12700">
+            <a:solidFill>
+              <a:srgbClr val="8EDBD4"/>
+            </a:solidFill>
+          </a:ln>
+          <a:effectLst/>
+        </p:spPr>
+        <p:txBody>
+          <a:bodyPr rtlCol="0" anchor="ctr"/>
+          <a:lstStyle/>
+          <a:p>
+            <a:pPr algn="ctr"/>
+          </a:p>
+        </p:txBody>
+      </p:sp>
+      <p:sp>
+        <p:nvSpPr>
+          <p:cNvPr id="31" name="C1-E22 round_rect 29" descr="sci-ppt:o029"/>
+          <p:cNvSpPr/>
+          <p:nvPr/>
+        </p:nvSpPr>
+        <p:spPr>
+          <a:xfrm>
+            <a:off x="6858000" y="4572000"/>
+            <a:ext cx="4937760" cy="1600200"/>
+          </a:xfrm>
+          <a:prstGeom prst="roundRect">
+            <a:avLst/>
+          </a:prstGeom>
+          <a:solidFill>
+            <a:srgbClr val="213E4B"/>
+          </a:solidFill>
+          <a:ln w="20320">
+            <a:solidFill>
+              <a:srgbClr val="B4C7D2"/>
+            </a:solidFill>
+          </a:ln>
+          <a:effectLst/>
+        </p:spPr>
+        <p:txBody>
+          <a:bodyPr rtlCol="0" anchor="ctr"/>
+          <a:lstStyle/>
+          <a:p>
+            <a:pPr algn="ctr"/>
+          </a:p>
+        </p:txBody>
+      </p:sp>
+      <p:sp>
+        <p:nvSpPr>
+          <p:cNvPr id="32" name="C1-E22 text 30" descr="sci-ppt:o030"/>
           <p:cNvSpPr txBox="1"/>
           <p:nvPr/>
         </p:nvSpPr>
         <p:spPr>
           <a:xfrm>
-            <a:off x="457200" y="5349240"/>
-            <a:ext cx="11338560" cy="239395"/>
+            <a:off x="6995160" y="4636008"/>
+            <a:ext cx="4663440" cy="247142"/>
           </a:xfrm>
           <a:prstGeom prst="rect">
             <a:avLst/>
@@ -4451,20 +4533,92 @@
               </a:spcAft>
             </a:pPr>
             <a:r>
-              <a:rPr sz="1250" b="0" i="0">
+              <a:rPr sz="1300" b="1" i="0">
                 <a:solidFill>
-                  <a:srgbClr val="B4C7D2"/>
+                  <a:srgbClr val="E7F0F3"/>
                 </a:solidFill>
                 <a:latin typeface="Arial"/>
               </a:rPr>
-              <a:t>Teaching case: Π₀ = 0.30 Pa·s, ρ = 1000 kg/m³, L = 100 µm, τ = 0.5 µs, ν = 10⁻⁶ m²/s.</a:t>
-            </a:r>
-          </a:p>
-        </p:txBody>
-      </p:sp>
-      <p:sp>
-        <p:nvSpPr>
-          <p:cNvPr id="38" name="C1-E22 text 36" descr="sci-ppt:o036"/>
+              <a:t>Conditions: Uτ/L ≪ 1 and ντ/L² ≪ 1.</a:t>
+            </a:r>
+          </a:p>
+        </p:txBody>
+      </p:sp>
+      <p:sp>
+        <p:nvSpPr>
+          <p:cNvPr id="33" name="C1-E22 text 31" descr="sci-ppt:o031"/>
+          <p:cNvSpPr txBox="1"/>
+          <p:nvPr/>
+        </p:nvSpPr>
+        <p:spPr>
+          <a:xfrm>
+            <a:off x="6995160" y="5029200"/>
+            <a:ext cx="4663440" cy="626745"/>
+          </a:xfrm>
+          <a:prstGeom prst="rect">
+            <a:avLst/>
+          </a:prstGeom>
+          <a:noFill/>
+          <a:effectLst/>
+        </p:spPr>
+        <p:txBody>
+          <a:bodyPr wrap="none" lIns="18288" rIns="18288" tIns="18288" bIns="18288" anchor="t">
+            <a:spAutoFit/>
+          </a:bodyPr>
+          <a:lstStyle/>
+          <a:p>
+            <a:pPr algn="l">
+              <a:spcAft>
+                <a:spcPts val="0"/>
+              </a:spcAft>
+            </a:pPr>
+            <a:r>
+              <a:rPr sz="1250" b="0" i="0">
+                <a:solidFill>
+                  <a:srgbClr val="F2B880"/>
+                </a:solidFill>
+                <a:latin typeface="Arial"/>
+              </a:rPr>
+              <a:t>Result: the velocity right after the pulse depends on</a:t>
+            </a:r>
+          </a:p>
+          <a:p>
+            <a:pPr algn="l">
+              <a:spcAft>
+                <a:spcPts val="0"/>
+              </a:spcAft>
+            </a:pPr>
+            <a:r>
+              <a:rPr sz="1250" b="0" i="0">
+                <a:solidFill>
+                  <a:srgbClr val="F2B880"/>
+                </a:solidFill>
+                <a:latin typeface="Arial"/>
+              </a:rPr>
+              <a:t>the shape of the liquid region, not on a detailed</a:t>
+            </a:r>
+          </a:p>
+          <a:p>
+            <a:pPr algn="l">
+              <a:spcAft>
+                <a:spcPts val="0"/>
+              </a:spcAft>
+            </a:pPr>
+            <a:r>
+              <a:rPr sz="1250" b="0" i="0">
+                <a:solidFill>
+                  <a:srgbClr val="F2B880"/>
+                </a:solidFill>
+                <a:latin typeface="Arial"/>
+              </a:rPr>
+              <a:t>pressure history.</a:t>
+            </a:r>
+          </a:p>
+        </p:txBody>
+      </p:sp>
+      <p:sp>
+        <p:nvSpPr>
+          <p:cNvPr id="34" name="C1-E22 text 32" descr="sci-ppt:o032"/>
           <p:cNvSpPr txBox="1"/>
           <p:nvPr/>
         </p:nvSpPr>
@@ -4497,7 +4651,7 @@
                 </a:solidFill>
                 <a:latin typeface="Arial"/>
               </a:rPr>
-              <a:t>Magnitudes from Eq. C1-E22 using the numbers of Eq. C1-E25.</a:t>
+              <a:t>Corner example: an exact harmonic solution chosen to show the geometry dependence; not a model of the laser event.</a:t>
             </a:r>
           </a:p>
         </p:txBody>
